--- a/十五五-房地产高质量发展-汇报大纲.pptx
+++ b/十五五-房地产高质量发展-汇报大纲.pptx
@@ -122,6 +122,2813 @@
     </a:lvl9pPr>
   </p:defaultTextStyle>
 </p:presentation>
+</file>
+
+<file path=ppt/notesMasters/notesMaster1.xml><?xml version="1.0" encoding="utf-8"?>
+<p:notesMaster xmlns:a="http://schemas.openxmlformats.org/drawingml/2006/main" xmlns:p="http://schemas.openxmlformats.org/presentationml/2006/main" xmlns:r="http://schemas.openxmlformats.org/officeDocument/2006/relationships">
+  <p:cSld>
+    <p:bg>
+      <p:bgRef idx="1001">
+        <a:schemeClr val="bg1"/>
+      </p:bgRef>
+    </p:bg>
+    <p:spTree>
+      <p:nvGrpSpPr>
+        <p:cNvPr id="1" name=""/>
+        <p:cNvGrpSpPr/>
+        <p:nvPr/>
+      </p:nvGrpSpPr>
+      <p:grpSpPr>
+        <a:xfrm>
+          <a:off x="0" y="0"/>
+          <a:ext cx="0" cy="0"/>
+          <a:chOff x="0" y="0"/>
+          <a:chExt cx="0" cy="0"/>
+        </a:xfrm>
+      </p:grpSpPr>
+      <p:sp>
+        <p:nvSpPr>
+          <p:cNvPr id="2" name="Header Placeholder 1"/>
+          <p:cNvSpPr>
+            <a:spLocks noGrp="1"/>
+          </p:cNvSpPr>
+          <p:nvPr>
+            <p:ph type="hdr" sz="quarter"/>
+          </p:nvPr>
+        </p:nvSpPr>
+        <p:spPr>
+          <a:xfrm>
+            <a:off x="0" y="0"/>
+            <a:ext cx="2971800" cy="457200"/>
+          </a:xfrm>
+          <a:prstGeom prst="rect">
+            <a:avLst/>
+          </a:prstGeom>
+        </p:spPr>
+        <p:txBody>
+          <a:bodyPr vert="horz" lIns="91440" tIns="45720" rIns="91440" bIns="45720" rtlCol="0"/>
+          <a:lstStyle>
+            <a:lvl1pPr algn="l">
+              <a:defRPr sz="1200"/>
+            </a:lvl1pPr>
+          </a:lstStyle>
+          <a:p>
+            <a:endParaRPr lang="en-US"/>
+          </a:p>
+        </p:txBody>
+      </p:sp>
+      <p:sp>
+        <p:nvSpPr>
+          <p:cNvPr id="3" name="Date Placeholder 2"/>
+          <p:cNvSpPr>
+            <a:spLocks noGrp="1"/>
+          </p:cNvSpPr>
+          <p:nvPr>
+            <p:ph type="dt" idx="1"/>
+          </p:nvPr>
+        </p:nvSpPr>
+        <p:spPr>
+          <a:xfrm>
+            <a:off x="3884613" y="0"/>
+            <a:ext cx="2971800" cy="457200"/>
+          </a:xfrm>
+          <a:prstGeom prst="rect">
+            <a:avLst/>
+          </a:prstGeom>
+        </p:spPr>
+        <p:txBody>
+          <a:bodyPr vert="horz" lIns="91440" tIns="45720" rIns="91440" bIns="45720" rtlCol="0"/>
+          <a:lstStyle>
+            <a:lvl1pPr algn="r">
+              <a:defRPr sz="1200"/>
+            </a:lvl1pPr>
+          </a:lstStyle>
+          <a:p>
+            <a:fld id="{0F89C1C7-3DCD-1040-A9CF-14679D8B5DDD}" type="datetimeFigureOut">
+              <a:rPr lang="en-US" smtClean="0"/>
+              <a:t>10/17/16</a:t>
+            </a:fld>
+            <a:endParaRPr lang="en-US"/>
+          </a:p>
+        </p:txBody>
+      </p:sp>
+      <p:sp>
+        <p:nvSpPr>
+          <p:cNvPr id="4" name="Slide Image Placeholder 3"/>
+          <p:cNvSpPr>
+            <a:spLocks noGrp="1" noRot="1" noChangeAspect="1"/>
+          </p:cNvSpPr>
+          <p:nvPr>
+            <p:ph type="sldImg" idx="2"/>
+          </p:nvPr>
+        </p:nvSpPr>
+        <p:spPr>
+          <a:xfrm>
+            <a:off x="1143000" y="685800"/>
+            <a:ext cx="4572000" cy="3429000"/>
+          </a:xfrm>
+          <a:prstGeom prst="rect">
+            <a:avLst/>
+          </a:prstGeom>
+          <a:noFill/>
+          <a:ln w="12700">
+            <a:solidFill>
+              <a:prstClr val="black"/>
+            </a:solidFill>
+          </a:ln>
+        </p:spPr>
+        <p:txBody>
+          <a:bodyPr vert="horz" lIns="91440" tIns="45720" rIns="91440" bIns="45720" rtlCol="0" anchor="ctr"/>
+          <a:lstStyle/>
+          <a:p>
+            <a:endParaRPr lang="en-US"/>
+          </a:p>
+        </p:txBody>
+      </p:sp>
+      <p:sp>
+        <p:nvSpPr>
+          <p:cNvPr id="5" name="Notes Placeholder 4"/>
+          <p:cNvSpPr>
+            <a:spLocks noGrp="1"/>
+          </p:cNvSpPr>
+          <p:nvPr>
+            <p:ph type="body" sz="quarter" idx="3"/>
+          </p:nvPr>
+        </p:nvSpPr>
+        <p:spPr>
+          <a:xfrm>
+            <a:off x="685800" y="4343400"/>
+            <a:ext cx="5486400" cy="4114800"/>
+          </a:xfrm>
+          <a:prstGeom prst="rect">
+            <a:avLst/>
+          </a:prstGeom>
+        </p:spPr>
+        <p:txBody>
+          <a:bodyPr vert="horz" lIns="91440" tIns="45720" rIns="91440" bIns="45720" rtlCol="0"/>
+          <a:lstStyle/>
+          <a:p>
+            <a:pPr lvl="0"/>
+            <a:r>
+              <a:rPr lang="en-US" smtClean="0"/>
+              <a:t>Click to edit Master text styles</a:t>
+            </a:r>
+          </a:p>
+          <a:p>
+            <a:pPr lvl="1"/>
+            <a:r>
+              <a:rPr lang="en-US" smtClean="0"/>
+              <a:t>Second level</a:t>
+            </a:r>
+          </a:p>
+          <a:p>
+            <a:pPr lvl="2"/>
+            <a:r>
+              <a:rPr lang="en-US" smtClean="0"/>
+              <a:t>Third level</a:t>
+            </a:r>
+          </a:p>
+          <a:p>
+            <a:pPr lvl="3"/>
+            <a:r>
+              <a:rPr lang="en-US" smtClean="0"/>
+              <a:t>Fourth level</a:t>
+            </a:r>
+          </a:p>
+          <a:p>
+            <a:pPr lvl="4"/>
+            <a:r>
+              <a:rPr lang="en-US" smtClean="0"/>
+              <a:t>Fifth level</a:t>
+            </a:r>
+            <a:endParaRPr lang="en-US"/>
+          </a:p>
+        </p:txBody>
+      </p:sp>
+      <p:sp>
+        <p:nvSpPr>
+          <p:cNvPr id="6" name="Footer Placeholder 5"/>
+          <p:cNvSpPr>
+            <a:spLocks noGrp="1"/>
+          </p:cNvSpPr>
+          <p:nvPr>
+            <p:ph type="ftr" sz="quarter" idx="4"/>
+          </p:nvPr>
+        </p:nvSpPr>
+        <p:spPr>
+          <a:xfrm>
+            <a:off x="0" y="8685213"/>
+            <a:ext cx="2971800" cy="457200"/>
+          </a:xfrm>
+          <a:prstGeom prst="rect">
+            <a:avLst/>
+          </a:prstGeom>
+        </p:spPr>
+        <p:txBody>
+          <a:bodyPr vert="horz" lIns="91440" tIns="45720" rIns="91440" bIns="45720" rtlCol="0" anchor="b"/>
+          <a:lstStyle>
+            <a:lvl1pPr algn="l">
+              <a:defRPr sz="1200"/>
+            </a:lvl1pPr>
+          </a:lstStyle>
+          <a:p>
+            <a:endParaRPr lang="en-US"/>
+          </a:p>
+        </p:txBody>
+      </p:sp>
+      <p:sp>
+        <p:nvSpPr>
+          <p:cNvPr id="7" name="Slide Number Placeholder 6"/>
+          <p:cNvSpPr>
+            <a:spLocks noGrp="1"/>
+          </p:cNvSpPr>
+          <p:nvPr>
+            <p:ph type="sldNum" sz="quarter" idx="5"/>
+          </p:nvPr>
+        </p:nvSpPr>
+        <p:spPr>
+          <a:xfrm>
+            <a:off x="3884613" y="8685213"/>
+            <a:ext cx="2971800" cy="457200"/>
+          </a:xfrm>
+          <a:prstGeom prst="rect">
+            <a:avLst/>
+          </a:prstGeom>
+        </p:spPr>
+        <p:txBody>
+          <a:bodyPr vert="horz" lIns="91440" tIns="45720" rIns="91440" bIns="45720" rtlCol="0" anchor="b"/>
+          <a:lstStyle>
+            <a:lvl1pPr algn="r">
+              <a:defRPr sz="1200"/>
+            </a:lvl1pPr>
+          </a:lstStyle>
+          <a:p>
+            <a:fld id="{BB5E49A5-4136-284D-997B-48E1D791AD67}" type="slidenum">
+              <a:rPr lang="en-US" smtClean="0"/>
+              <a:t>‹#›</a:t>
+            </a:fld>
+            <a:endParaRPr lang="en-US"/>
+          </a:p>
+        </p:txBody>
+      </p:sp>
+    </p:spTree>
+    <p:extLst>
+      <p:ext uri="{BB962C8B-B14F-4D97-AF65-F5344CB8AC3E}">
+        <p14:creationId xmlns:p14="http://schemas.microsoft.com/office/powerpoint/2010/main" val="2623252185"/>
+      </p:ext>
+    </p:extLst>
+  </p:cSld>
+  <p:clrMap bg1="lt1" tx1="dk1" bg2="lt2" tx2="dk2" accent1="accent1" accent2="accent2" accent3="accent3" accent4="accent4" accent5="accent5" accent6="accent6" hlink="hlink" folHlink="folHlink"/>
+  <p:notesStyle>
+    <a:lvl1pPr marL="0" algn="l" defTabSz="457200" rtl="0" eaLnBrk="1" latinLnBrk="0" hangingPunct="1">
+      <a:defRPr sz="1200" kern="1200">
+        <a:solidFill>
+          <a:schemeClr val="tx1"/>
+        </a:solidFill>
+        <a:latin typeface="+mn-lt"/>
+        <a:ea typeface="+mn-ea"/>
+        <a:cs typeface="+mn-cs"/>
+      </a:defRPr>
+    </a:lvl1pPr>
+    <a:lvl2pPr marL="457200" algn="l" defTabSz="457200" rtl="0" eaLnBrk="1" latinLnBrk="0" hangingPunct="1">
+      <a:defRPr sz="1200" kern="1200">
+        <a:solidFill>
+          <a:schemeClr val="tx1"/>
+        </a:solidFill>
+        <a:latin typeface="+mn-lt"/>
+        <a:ea typeface="+mn-ea"/>
+        <a:cs typeface="+mn-cs"/>
+      </a:defRPr>
+    </a:lvl2pPr>
+    <a:lvl3pPr marL="914400" algn="l" defTabSz="457200" rtl="0" eaLnBrk="1" latinLnBrk="0" hangingPunct="1">
+      <a:defRPr sz="1200" kern="1200">
+        <a:solidFill>
+          <a:schemeClr val="tx1"/>
+        </a:solidFill>
+        <a:latin typeface="+mn-lt"/>
+        <a:ea typeface="+mn-ea"/>
+        <a:cs typeface="+mn-cs"/>
+      </a:defRPr>
+    </a:lvl3pPr>
+    <a:lvl4pPr marL="1371600" algn="l" defTabSz="457200" rtl="0" eaLnBrk="1" latinLnBrk="0" hangingPunct="1">
+      <a:defRPr sz="1200" kern="1200">
+        <a:solidFill>
+          <a:schemeClr val="tx1"/>
+        </a:solidFill>
+        <a:latin typeface="+mn-lt"/>
+        <a:ea typeface="+mn-ea"/>
+        <a:cs typeface="+mn-cs"/>
+      </a:defRPr>
+    </a:lvl4pPr>
+    <a:lvl5pPr marL="1828800" algn="l" defTabSz="457200" rtl="0" eaLnBrk="1" latinLnBrk="0" hangingPunct="1">
+      <a:defRPr sz="1200" kern="1200">
+        <a:solidFill>
+          <a:schemeClr val="tx1"/>
+        </a:solidFill>
+        <a:latin typeface="+mn-lt"/>
+        <a:ea typeface="+mn-ea"/>
+        <a:cs typeface="+mn-cs"/>
+      </a:defRPr>
+    </a:lvl5pPr>
+    <a:lvl6pPr marL="2286000" algn="l" defTabSz="457200" rtl="0" eaLnBrk="1" latinLnBrk="0" hangingPunct="1">
+      <a:defRPr sz="1200" kern="1200">
+        <a:solidFill>
+          <a:schemeClr val="tx1"/>
+        </a:solidFill>
+        <a:latin typeface="+mn-lt"/>
+        <a:ea typeface="+mn-ea"/>
+        <a:cs typeface="+mn-cs"/>
+      </a:defRPr>
+    </a:lvl6pPr>
+    <a:lvl7pPr marL="2743200" algn="l" defTabSz="457200" rtl="0" eaLnBrk="1" latinLnBrk="0" hangingPunct="1">
+      <a:defRPr sz="1200" kern="1200">
+        <a:solidFill>
+          <a:schemeClr val="tx1"/>
+        </a:solidFill>
+        <a:latin typeface="+mn-lt"/>
+        <a:ea typeface="+mn-ea"/>
+        <a:cs typeface="+mn-cs"/>
+      </a:defRPr>
+    </a:lvl7pPr>
+    <a:lvl8pPr marL="3200400" algn="l" defTabSz="457200" rtl="0" eaLnBrk="1" latinLnBrk="0" hangingPunct="1">
+      <a:defRPr sz="1200" kern="1200">
+        <a:solidFill>
+          <a:schemeClr val="tx1"/>
+        </a:solidFill>
+        <a:latin typeface="+mn-lt"/>
+        <a:ea typeface="+mn-ea"/>
+        <a:cs typeface="+mn-cs"/>
+      </a:defRPr>
+    </a:lvl8pPr>
+    <a:lvl9pPr marL="3657600" algn="l" defTabSz="457200" rtl="0" eaLnBrk="1" latinLnBrk="0" hangingPunct="1">
+      <a:defRPr sz="1200" kern="1200">
+        <a:solidFill>
+          <a:schemeClr val="tx1"/>
+        </a:solidFill>
+        <a:latin typeface="+mn-lt"/>
+        <a:ea typeface="+mn-ea"/>
+        <a:cs typeface="+mn-cs"/>
+      </a:defRPr>
+    </a:lvl9pPr>
+  </p:notesStyle>
+</p:notesMaster>
+</file>
+
+<file path=ppt/notesSlides/notesSlide1.xml><?xml version="1.0" encoding="utf-8"?>
+<p:notes xmlns:a="http://schemas.openxmlformats.org/drawingml/2006/main" xmlns:p="http://schemas.openxmlformats.org/presentationml/2006/main" xmlns:r="http://schemas.openxmlformats.org/officeDocument/2006/relationships">
+  <p:cSld>
+    <p:spTree>
+      <p:nvGrpSpPr>
+        <p:cNvPr id="1" name=""/>
+        <p:cNvGrpSpPr/>
+        <p:nvPr/>
+      </p:nvGrpSpPr>
+      <p:grpSpPr>
+        <a:xfrm>
+          <a:off x="0" y="0"/>
+          <a:ext cx="0" cy="0"/>
+          <a:chOff x="0" y="0"/>
+          <a:chExt cx="0" cy="0"/>
+        </a:xfrm>
+      </p:grpSpPr>
+      <p:sp>
+        <p:nvSpPr>
+          <p:cNvPr id="2" name="Slide Image Placeholder 1"/>
+          <p:cNvSpPr>
+            <a:spLocks noGrp="1"/>
+          </p:cNvSpPr>
+          <p:nvPr>
+            <p:ph type="sldImg" idx="2"/>
+          </p:nvPr>
+        </p:nvSpPr>
+        <p:spPr/>
+      </p:sp>
+      <p:sp>
+        <p:nvSpPr>
+          <p:cNvPr id="3" name="Notes Placeholder 2"/>
+          <p:cNvSpPr>
+            <a:spLocks noGrp="1"/>
+          </p:cNvSpPr>
+          <p:nvPr>
+            <p:ph type="body" idx="3" sz="quarter"/>
+          </p:nvPr>
+        </p:nvSpPr>
+        <p:spPr/>
+        <p:txBody>
+          <a:bodyPr/>
+          <a:lstStyle/>
+          <a:p>
+            <a:pPr algn="l"/>
+            <a:r>
+              <a:rPr sz="1300">
+                <a:latin typeface="Microsoft YaHei"/>
+                <a:ea typeface="Microsoft YaHei"/>
+                <a:cs typeface="Microsoft YaHei"/>
+              </a:rPr>
+              <a:t>【开场 · 约 30 秒】</a:t>
+            </a:r>
+          </a:p>
+          <a:p>
+            <a:pPr algn="l"/>
+            <a:r>
+              <a:rPr sz="1300">
+                <a:latin typeface="Microsoft YaHei"/>
+                <a:ea typeface="Microsoft YaHei"/>
+                <a:cs typeface="Microsoft YaHei"/>
+              </a:rPr>
+              <a:t>各位老师、各位同仁，下午好。非常荣幸今天能在房产经济学会的中青年研讨会上发言。</a:t>
+            </a:r>
+          </a:p>
+          <a:p>
+            <a:pPr algn="l"/>
+            <a:r>
+              <a:rPr sz="1300">
+                <a:latin typeface="Microsoft YaHei"/>
+                <a:ea typeface="Microsoft YaHei"/>
+                <a:cs typeface="Microsoft YaHei"/>
+              </a:rPr>
+              <a:t>我汇报的题目是——《"十五五"时期房地产高质量发展的新模式——以科技创新与产城融合为驱动》。</a:t>
+            </a:r>
+          </a:p>
+          <a:p>
+            <a:pPr algn="l"/>
+            <a:r>
+              <a:rPr sz="1300">
+                <a:latin typeface="Microsoft YaHei"/>
+                <a:ea typeface="Microsoft YaHei"/>
+                <a:cs typeface="Microsoft YaHei"/>
+              </a:rPr>
+              <a:t>我想用 30 分钟的时间，把我自己在一线对这个题目的观察和实践，做一个汇报，请各位老师批评指正。</a:t>
+            </a:r>
+          </a:p>
+        </p:txBody>
+      </p:sp>
+      <p:sp>
+        <p:nvSpPr>
+          <p:cNvPr id="4" name="Slide Number Placeholder 3"/>
+          <p:cNvSpPr>
+            <a:spLocks noGrp="1"/>
+          </p:cNvSpPr>
+          <p:nvPr>
+            <p:ph type="sldNum" idx="5" sz="quarter"/>
+          </p:nvPr>
+        </p:nvSpPr>
+        <p:spPr/>
+      </p:sp>
+    </p:spTree>
+  </p:cSld>
+  <p:clrMapOvr>
+    <a:masterClrMapping/>
+  </p:clrMapOvr>
+</p:notes>
+</file>
+
+<file path=ppt/notesSlides/notesSlide10.xml><?xml version="1.0" encoding="utf-8"?>
+<p:notes xmlns:a="http://schemas.openxmlformats.org/drawingml/2006/main" xmlns:p="http://schemas.openxmlformats.org/presentationml/2006/main" xmlns:r="http://schemas.openxmlformats.org/officeDocument/2006/relationships">
+  <p:cSld>
+    <p:spTree>
+      <p:nvGrpSpPr>
+        <p:cNvPr id="1" name=""/>
+        <p:cNvGrpSpPr/>
+        <p:nvPr/>
+      </p:nvGrpSpPr>
+      <p:grpSpPr>
+        <a:xfrm>
+          <a:off x="0" y="0"/>
+          <a:ext cx="0" cy="0"/>
+          <a:chOff x="0" y="0"/>
+          <a:chExt cx="0" cy="0"/>
+        </a:xfrm>
+      </p:grpSpPr>
+      <p:sp>
+        <p:nvSpPr>
+          <p:cNvPr id="2" name="Slide Image Placeholder 1"/>
+          <p:cNvSpPr>
+            <a:spLocks noGrp="1"/>
+          </p:cNvSpPr>
+          <p:nvPr>
+            <p:ph type="sldImg" idx="2"/>
+          </p:nvPr>
+        </p:nvSpPr>
+        <p:spPr/>
+      </p:sp>
+      <p:sp>
+        <p:nvSpPr>
+          <p:cNvPr id="3" name="Notes Placeholder 2"/>
+          <p:cNvSpPr>
+            <a:spLocks noGrp="1"/>
+          </p:cNvSpPr>
+          <p:nvPr>
+            <p:ph type="body" idx="3" sz="quarter"/>
+          </p:nvPr>
+        </p:nvSpPr>
+        <p:spPr/>
+        <p:txBody>
+          <a:bodyPr/>
+          <a:lstStyle/>
+          <a:p>
+            <a:pPr algn="l"/>
+            <a:r>
+              <a:rPr sz="1300">
+                <a:latin typeface="Microsoft YaHei"/>
+                <a:ea typeface="Microsoft YaHei"/>
+                <a:cs typeface="Microsoft YaHei"/>
+              </a:rPr>
+              <a:t>【约 4 分钟 · 新模式两大特征】</a:t>
+            </a:r>
+          </a:p>
+          <a:p>
+            <a:pPr algn="l"/>
+            <a:r>
+              <a:rPr sz="1300">
+                <a:latin typeface="Microsoft YaHei"/>
+                <a:ea typeface="Microsoft YaHei"/>
+                <a:cs typeface="Microsoft YaHei"/>
+              </a:rPr>
+              <a:t>具体来说，"新模式"有两大底层特征：</a:t>
+            </a:r>
+          </a:p>
+          <a:p>
+            <a:pPr algn="l"/>
+            <a:r>
+              <a:rPr sz="1300">
+                <a:latin typeface="Microsoft YaHei"/>
+                <a:ea typeface="Microsoft YaHei"/>
+                <a:cs typeface="Microsoft YaHei"/>
+              </a:rPr>
+              <a:t>一个是"轻重分离"——重资产持有逐步转向轻资产管理输出和品牌输出。</a:t>
+            </a:r>
+          </a:p>
+          <a:p>
+            <a:pPr algn="l"/>
+            <a:r>
+              <a:rPr sz="1300">
+                <a:latin typeface="Microsoft YaHei"/>
+                <a:ea typeface="Microsoft YaHei"/>
+                <a:cs typeface="Microsoft YaHei"/>
+              </a:rPr>
+              <a:t>资本结构上，降低对单一开发利润和高杠杆融资的依赖；</a:t>
+            </a:r>
+          </a:p>
+          <a:p>
+            <a:pPr algn="l"/>
+            <a:r>
+              <a:rPr sz="1300">
+                <a:latin typeface="Microsoft YaHei"/>
+                <a:ea typeface="Microsoft YaHei"/>
+                <a:cs typeface="Microsoft YaHei"/>
+              </a:rPr>
+              <a:t>能力上，把管理、运营、招商、科技四种能力打包对外赋能；</a:t>
+            </a:r>
+          </a:p>
+          <a:p>
+            <a:pPr algn="l"/>
+            <a:r>
+              <a:rPr sz="1300">
+                <a:latin typeface="Microsoft YaHei"/>
+                <a:ea typeface="Microsoft YaHei"/>
+                <a:cs typeface="Microsoft YaHei"/>
+              </a:rPr>
+              <a:t>收益上，做管理费 + 业绩分成 + 长期租金 + 资管增值的复合结构；</a:t>
+            </a:r>
+          </a:p>
+          <a:p>
+            <a:pPr algn="l"/>
+            <a:r>
+              <a:rPr sz="1300">
+                <a:latin typeface="Microsoft YaHei"/>
+                <a:ea typeface="Microsoft YaHei"/>
+                <a:cs typeface="Microsoft YaHei"/>
+              </a:rPr>
+              <a:t>退出上，对接公募 REITs、类 REITs、不动产私募基金。</a:t>
+            </a:r>
+          </a:p>
+          <a:p>
+            <a:pPr algn="l"/>
+            <a:r>
+              <a:rPr sz="1300">
+                <a:latin typeface="Microsoft YaHei"/>
+                <a:ea typeface="Microsoft YaHei"/>
+                <a:cs typeface="Microsoft YaHei"/>
+              </a:rPr>
+              <a:t>另一个是"产城融合"——把不动产真正嵌入实体经济，</a:t>
+            </a:r>
+          </a:p>
+          <a:p>
+            <a:pPr algn="l"/>
+            <a:r>
+              <a:rPr sz="1300">
+                <a:latin typeface="Microsoft YaHei"/>
+                <a:ea typeface="Microsoft YaHei"/>
+                <a:cs typeface="Microsoft YaHei"/>
+              </a:rPr>
+              <a:t>打造科创"超级会客厅"，对接高校智库、科技企业和国际创新资源；</a:t>
+            </a:r>
+          </a:p>
+          <a:p>
+            <a:pPr algn="l"/>
+            <a:r>
+              <a:rPr sz="1300">
+                <a:latin typeface="Microsoft YaHei"/>
+                <a:ea typeface="Microsoft YaHei"/>
+                <a:cs typeface="Microsoft YaHei"/>
+              </a:rPr>
+              <a:t>围绕"专精特新"企业，包括新冒出来的 OPC 单一人公司这类新主体，做定制化的场景运营；</a:t>
+            </a:r>
+          </a:p>
+          <a:p>
+            <a:pPr algn="l"/>
+            <a:r>
+              <a:rPr sz="1300">
+                <a:latin typeface="Microsoft YaHei"/>
+                <a:ea typeface="Microsoft YaHei"/>
+                <a:cs typeface="Microsoft YaHei"/>
+              </a:rPr>
+              <a:t>让不动产成为产业升级和城市更新的"连接器"，承担孕育新质生产力的物理底座。</a:t>
+            </a:r>
+          </a:p>
+          <a:p>
+            <a:pPr algn="l"/>
+            <a:r>
+              <a:rPr sz="1300">
+                <a:latin typeface="Microsoft YaHei"/>
+                <a:ea typeface="Microsoft YaHei"/>
+                <a:cs typeface="Microsoft YaHei"/>
+              </a:rPr>
+              <a:t>一手做减法（轻），一手做加法（产）——这就是新模式的两条腿。</a:t>
+            </a:r>
+          </a:p>
+        </p:txBody>
+      </p:sp>
+      <p:sp>
+        <p:nvSpPr>
+          <p:cNvPr id="4" name="Slide Number Placeholder 3"/>
+          <p:cNvSpPr>
+            <a:spLocks noGrp="1"/>
+          </p:cNvSpPr>
+          <p:nvPr>
+            <p:ph type="sldNum" idx="5" sz="quarter"/>
+          </p:nvPr>
+        </p:nvSpPr>
+        <p:spPr/>
+      </p:sp>
+    </p:spTree>
+  </p:cSld>
+  <p:clrMapOvr>
+    <a:masterClrMapping/>
+  </p:clrMapOvr>
+</p:notes>
+</file>
+
+<file path=ppt/notesSlides/notesSlide11.xml><?xml version="1.0" encoding="utf-8"?>
+<p:notes xmlns:a="http://schemas.openxmlformats.org/drawingml/2006/main" xmlns:p="http://schemas.openxmlformats.org/presentationml/2006/main" xmlns:r="http://schemas.openxmlformats.org/officeDocument/2006/relationships">
+  <p:cSld>
+    <p:spTree>
+      <p:nvGrpSpPr>
+        <p:cNvPr id="1" name=""/>
+        <p:cNvGrpSpPr/>
+        <p:nvPr/>
+      </p:nvGrpSpPr>
+      <p:grpSpPr>
+        <a:xfrm>
+          <a:off x="0" y="0"/>
+          <a:ext cx="0" cy="0"/>
+          <a:chOff x="0" y="0"/>
+          <a:chExt cx="0" cy="0"/>
+        </a:xfrm>
+      </p:grpSpPr>
+      <p:sp>
+        <p:nvSpPr>
+          <p:cNvPr id="2" name="Slide Image Placeholder 1"/>
+          <p:cNvSpPr>
+            <a:spLocks noGrp="1"/>
+          </p:cNvSpPr>
+          <p:nvPr>
+            <p:ph type="sldImg" idx="2"/>
+          </p:nvPr>
+        </p:nvSpPr>
+        <p:spPr/>
+      </p:sp>
+      <p:sp>
+        <p:nvSpPr>
+          <p:cNvPr id="3" name="Notes Placeholder 2"/>
+          <p:cNvSpPr>
+            <a:spLocks noGrp="1"/>
+          </p:cNvSpPr>
+          <p:nvPr>
+            <p:ph type="body" idx="3" sz="quarter"/>
+          </p:nvPr>
+        </p:nvSpPr>
+        <p:spPr/>
+        <p:txBody>
+          <a:bodyPr/>
+          <a:lstStyle/>
+          <a:p>
+            <a:pPr algn="l"/>
+            <a:r>
+              <a:rPr sz="1300">
+                <a:latin typeface="Microsoft YaHei"/>
+                <a:ea typeface="Microsoft YaHei"/>
+                <a:cs typeface="Microsoft YaHei"/>
+              </a:rPr>
+              <a:t>【PART 03 章节切换 · 10 秒】</a:t>
+            </a:r>
+          </a:p>
+          <a:p>
+            <a:pPr algn="l"/>
+            <a:r>
+              <a:rPr sz="1300">
+                <a:latin typeface="Microsoft YaHei"/>
+                <a:ea typeface="Microsoft YaHei"/>
+                <a:cs typeface="Microsoft YaHei"/>
+              </a:rPr>
+              <a:t>下面进入今天的重点——第三部分，核心动能：科技创新如何驱动不动产高质量发展。</a:t>
+            </a:r>
+          </a:p>
+          <a:p>
+            <a:pPr algn="l"/>
+            <a:r>
+              <a:rPr sz="1300">
+                <a:latin typeface="Microsoft YaHei"/>
+                <a:ea typeface="Microsoft YaHei"/>
+                <a:cs typeface="Microsoft YaHei"/>
+              </a:rPr>
+              <a:t>这一段我用 12 分钟，主要结合我自己实战中看到的场景来谈。</a:t>
+            </a:r>
+          </a:p>
+        </p:txBody>
+      </p:sp>
+      <p:sp>
+        <p:nvSpPr>
+          <p:cNvPr id="4" name="Slide Number Placeholder 3"/>
+          <p:cNvSpPr>
+            <a:spLocks noGrp="1"/>
+          </p:cNvSpPr>
+          <p:nvPr>
+            <p:ph type="sldNum" idx="5" sz="quarter"/>
+          </p:nvPr>
+        </p:nvSpPr>
+        <p:spPr/>
+      </p:sp>
+    </p:spTree>
+  </p:cSld>
+  <p:clrMapOvr>
+    <a:masterClrMapping/>
+  </p:clrMapOvr>
+</p:notes>
+</file>
+
+<file path=ppt/notesSlides/notesSlide12.xml><?xml version="1.0" encoding="utf-8"?>
+<p:notes xmlns:a="http://schemas.openxmlformats.org/drawingml/2006/main" xmlns:p="http://schemas.openxmlformats.org/presentationml/2006/main" xmlns:r="http://schemas.openxmlformats.org/officeDocument/2006/relationships">
+  <p:cSld>
+    <p:spTree>
+      <p:nvGrpSpPr>
+        <p:cNvPr id="1" name=""/>
+        <p:cNvGrpSpPr/>
+        <p:nvPr/>
+      </p:nvGrpSpPr>
+      <p:grpSpPr>
+        <a:xfrm>
+          <a:off x="0" y="0"/>
+          <a:ext cx="0" cy="0"/>
+          <a:chOff x="0" y="0"/>
+          <a:chExt cx="0" cy="0"/>
+        </a:xfrm>
+      </p:grpSpPr>
+      <p:sp>
+        <p:nvSpPr>
+          <p:cNvPr id="2" name="Slide Image Placeholder 1"/>
+          <p:cNvSpPr>
+            <a:spLocks noGrp="1"/>
+          </p:cNvSpPr>
+          <p:nvPr>
+            <p:ph type="sldImg" idx="2"/>
+          </p:nvPr>
+        </p:nvSpPr>
+        <p:spPr/>
+      </p:sp>
+      <p:sp>
+        <p:nvSpPr>
+          <p:cNvPr id="3" name="Notes Placeholder 2"/>
+          <p:cNvSpPr>
+            <a:spLocks noGrp="1"/>
+          </p:cNvSpPr>
+          <p:nvPr>
+            <p:ph type="body" idx="3" sz="quarter"/>
+          </p:nvPr>
+        </p:nvSpPr>
+        <p:spPr/>
+        <p:txBody>
+          <a:bodyPr/>
+          <a:lstStyle/>
+          <a:p>
+            <a:pPr algn="l"/>
+            <a:r>
+              <a:rPr sz="1300">
+                <a:latin typeface="Microsoft YaHei"/>
+                <a:ea typeface="Microsoft YaHei"/>
+                <a:cs typeface="Microsoft YaHei"/>
+              </a:rPr>
+              <a:t>【约 1.5 分钟 · 三条主线总览】</a:t>
+            </a:r>
+          </a:p>
+          <a:p>
+            <a:pPr algn="l"/>
+            <a:r>
+              <a:rPr sz="1300">
+                <a:latin typeface="Microsoft YaHei"/>
+                <a:ea typeface="Microsoft YaHei"/>
+                <a:cs typeface="Microsoft YaHei"/>
+              </a:rPr>
+              <a:t>我把科技驱动不动产的路径，归纳为三条主线：</a:t>
+            </a:r>
+          </a:p>
+          <a:p>
+            <a:pPr algn="l"/>
+            <a:r>
+              <a:rPr sz="1300">
+                <a:latin typeface="Microsoft YaHei"/>
+                <a:ea typeface="Microsoft YaHei"/>
+                <a:cs typeface="Microsoft YaHei"/>
+              </a:rPr>
+              <a:t>第一条，管理提效——用 AI 和数字化重塑投资、资管、招商的全链路；</a:t>
+            </a:r>
+          </a:p>
+          <a:p>
+            <a:pPr algn="l"/>
+            <a:r>
+              <a:rPr sz="1300">
+                <a:latin typeface="Microsoft YaHei"/>
+                <a:ea typeface="Microsoft YaHei"/>
+                <a:cs typeface="Microsoft YaHei"/>
+              </a:rPr>
+              <a:t>第二条，空间增值——用科创生态对物理空间做二次赋能；</a:t>
+            </a:r>
+          </a:p>
+          <a:p>
+            <a:pPr algn="l"/>
+            <a:r>
+              <a:rPr sz="1300">
+                <a:latin typeface="Microsoft YaHei"/>
+                <a:ea typeface="Microsoft YaHei"/>
+                <a:cs typeface="Microsoft YaHei"/>
+              </a:rPr>
+              <a:t>第三条，跨界协同——打通"学术—产业—投资"的三圈壁垒。</a:t>
+            </a:r>
+          </a:p>
+          <a:p>
+            <a:pPr algn="l"/>
+            <a:r>
+              <a:rPr sz="1300">
+                <a:latin typeface="Microsoft YaHei"/>
+                <a:ea typeface="Microsoft YaHei"/>
+                <a:cs typeface="Microsoft YaHei"/>
+              </a:rPr>
+              <a:t>这三条主线，决定了行业未来五年的"代差"——谁先跑通，谁就跑出新模式的样板。</a:t>
+            </a:r>
+          </a:p>
+          <a:p>
+            <a:pPr algn="l"/>
+            <a:r>
+              <a:rPr sz="1300">
+                <a:latin typeface="Microsoft YaHei"/>
+                <a:ea typeface="Microsoft YaHei"/>
+                <a:cs typeface="Microsoft YaHei"/>
+              </a:rPr>
+              <a:t>我下面逐条展开。</a:t>
+            </a:r>
+          </a:p>
+        </p:txBody>
+      </p:sp>
+      <p:sp>
+        <p:nvSpPr>
+          <p:cNvPr id="4" name="Slide Number Placeholder 3"/>
+          <p:cNvSpPr>
+            <a:spLocks noGrp="1"/>
+          </p:cNvSpPr>
+          <p:nvPr>
+            <p:ph type="sldNum" idx="5" sz="quarter"/>
+          </p:nvPr>
+        </p:nvSpPr>
+        <p:spPr/>
+      </p:sp>
+    </p:spTree>
+  </p:cSld>
+  <p:clrMapOvr>
+    <a:masterClrMapping/>
+  </p:clrMapOvr>
+</p:notes>
+</file>
+
+<file path=ppt/notesSlides/notesSlide13.xml><?xml version="1.0" encoding="utf-8"?>
+<p:notes xmlns:a="http://schemas.openxmlformats.org/drawingml/2006/main" xmlns:p="http://schemas.openxmlformats.org/presentationml/2006/main" xmlns:r="http://schemas.openxmlformats.org/officeDocument/2006/relationships">
+  <p:cSld>
+    <p:spTree>
+      <p:nvGrpSpPr>
+        <p:cNvPr id="1" name=""/>
+        <p:cNvGrpSpPr/>
+        <p:nvPr/>
+      </p:nvGrpSpPr>
+      <p:grpSpPr>
+        <a:xfrm>
+          <a:off x="0" y="0"/>
+          <a:ext cx="0" cy="0"/>
+          <a:chOff x="0" y="0"/>
+          <a:chExt cx="0" cy="0"/>
+        </a:xfrm>
+      </p:grpSpPr>
+      <p:sp>
+        <p:nvSpPr>
+          <p:cNvPr id="2" name="Slide Image Placeholder 1"/>
+          <p:cNvSpPr>
+            <a:spLocks noGrp="1"/>
+          </p:cNvSpPr>
+          <p:nvPr>
+            <p:ph type="sldImg" idx="2"/>
+          </p:nvPr>
+        </p:nvSpPr>
+        <p:spPr/>
+      </p:sp>
+      <p:sp>
+        <p:nvSpPr>
+          <p:cNvPr id="3" name="Notes Placeholder 2"/>
+          <p:cNvSpPr>
+            <a:spLocks noGrp="1"/>
+          </p:cNvSpPr>
+          <p:nvPr>
+            <p:ph type="body" idx="3" sz="quarter"/>
+          </p:nvPr>
+        </p:nvSpPr>
+        <p:spPr/>
+        <p:txBody>
+          <a:bodyPr/>
+          <a:lstStyle/>
+          <a:p>
+            <a:pPr algn="l"/>
+            <a:r>
+              <a:rPr sz="1300">
+                <a:latin typeface="Microsoft YaHei"/>
+                <a:ea typeface="Microsoft YaHei"/>
+                <a:cs typeface="Microsoft YaHei"/>
+              </a:rPr>
+              <a:t>【约 3.5 分钟 · 管理提效 · 第三部分主阵地之一】</a:t>
+            </a:r>
+          </a:p>
+          <a:p>
+            <a:pPr algn="l"/>
+            <a:r>
+              <a:rPr sz="1300">
+                <a:latin typeface="Microsoft YaHei"/>
+                <a:ea typeface="Microsoft YaHei"/>
+                <a:cs typeface="Microsoft YaHei"/>
+              </a:rPr>
+              <a:t>先说第一条——管理提效，重点是大语言模型加 AI 在不动产经营的落地。</a:t>
+            </a:r>
+          </a:p>
+          <a:p>
+            <a:pPr algn="l"/>
+            <a:r>
+              <a:rPr sz="1300">
+                <a:latin typeface="Microsoft YaHei"/>
+                <a:ea typeface="Microsoft YaHei"/>
+                <a:cs typeface="Microsoft YaHei"/>
+              </a:rPr>
+              <a:t>四个最直接的场景：</a:t>
+            </a:r>
+          </a:p>
+          <a:p>
+            <a:pPr algn="l"/>
+            <a:r>
+              <a:rPr sz="1300">
+                <a:latin typeface="Microsoft YaHei"/>
+                <a:ea typeface="Microsoft YaHei"/>
+                <a:cs typeface="Microsoft YaHei"/>
+              </a:rPr>
+              <a:t>投资测算：LLM 辅助尽调，自动抽取租赁条款、跑可研、做敏感性分析；投资委员会的决策周期，可以从"周"压缩到"天"。</a:t>
+            </a:r>
+          </a:p>
+          <a:p>
+            <a:pPr algn="l"/>
+            <a:r>
+              <a:rPr sz="1300">
+                <a:latin typeface="Microsoft YaHei"/>
+                <a:ea typeface="Microsoft YaHei"/>
+                <a:cs typeface="Microsoft YaHei"/>
+              </a:rPr>
+              <a:t>资产管理：AI 驱动 NOI 优化，做租户画像、续约预测、能耗优化、维保排程；让资产 ROE / NOI 真正可视化、可追踪。</a:t>
+            </a:r>
+          </a:p>
+          <a:p>
+            <a:pPr algn="l"/>
+            <a:r>
+              <a:rPr sz="1300">
+                <a:latin typeface="Microsoft YaHei"/>
+                <a:ea typeface="Microsoft YaHei"/>
+                <a:cs typeface="Microsoft YaHei"/>
+              </a:rPr>
+              <a:t>招商引资：基于大模型构建"产业图谱 + 招商雷达"，精准触达专精特新、总部企业和外资客户，这是过去靠跑断腿才能做的事。</a:t>
+            </a:r>
+          </a:p>
+          <a:p>
+            <a:pPr algn="l"/>
+            <a:r>
+              <a:rPr sz="1300">
+                <a:latin typeface="Microsoft YaHei"/>
+                <a:ea typeface="Microsoft YaHei"/>
+                <a:cs typeface="Microsoft YaHei"/>
+              </a:rPr>
+              <a:t>风险合规：合同审查、合规巡检、舆情监测，全流程 AI 化，降低人工成本、提高风控韧性。</a:t>
+            </a:r>
+          </a:p>
+          <a:p>
+            <a:pPr algn="l"/>
+            <a:r>
+              <a:rPr sz="1300">
+                <a:latin typeface="Microsoft YaHei"/>
+                <a:ea typeface="Microsoft YaHei"/>
+                <a:cs typeface="Microsoft YaHei"/>
+              </a:rPr>
+              <a:t>关键词其实就四个——自动化、数据资产化、人机协同、端到端流程再造。</a:t>
+            </a:r>
+          </a:p>
+        </p:txBody>
+      </p:sp>
+      <p:sp>
+        <p:nvSpPr>
+          <p:cNvPr id="4" name="Slide Number Placeholder 3"/>
+          <p:cNvSpPr>
+            <a:spLocks noGrp="1"/>
+          </p:cNvSpPr>
+          <p:nvPr>
+            <p:ph type="sldNum" idx="5" sz="quarter"/>
+          </p:nvPr>
+        </p:nvSpPr>
+        <p:spPr/>
+      </p:sp>
+    </p:spTree>
+  </p:cSld>
+  <p:clrMapOvr>
+    <a:masterClrMapping/>
+  </p:clrMapOvr>
+</p:notes>
+</file>
+
+<file path=ppt/notesSlides/notesSlide14.xml><?xml version="1.0" encoding="utf-8"?>
+<p:notes xmlns:a="http://schemas.openxmlformats.org/drawingml/2006/main" xmlns:p="http://schemas.openxmlformats.org/presentationml/2006/main" xmlns:r="http://schemas.openxmlformats.org/officeDocument/2006/relationships">
+  <p:cSld>
+    <p:spTree>
+      <p:nvGrpSpPr>
+        <p:cNvPr id="1" name=""/>
+        <p:cNvGrpSpPr/>
+        <p:nvPr/>
+      </p:nvGrpSpPr>
+      <p:grpSpPr>
+        <a:xfrm>
+          <a:off x="0" y="0"/>
+          <a:ext cx="0" cy="0"/>
+          <a:chOff x="0" y="0"/>
+          <a:chExt cx="0" cy="0"/>
+        </a:xfrm>
+      </p:grpSpPr>
+      <p:sp>
+        <p:nvSpPr>
+          <p:cNvPr id="2" name="Slide Image Placeholder 1"/>
+          <p:cNvSpPr>
+            <a:spLocks noGrp="1"/>
+          </p:cNvSpPr>
+          <p:nvPr>
+            <p:ph type="sldImg" idx="2"/>
+          </p:nvPr>
+        </p:nvSpPr>
+        <p:spPr/>
+      </p:sp>
+      <p:sp>
+        <p:nvSpPr>
+          <p:cNvPr id="3" name="Notes Placeholder 2"/>
+          <p:cNvSpPr>
+            <a:spLocks noGrp="1"/>
+          </p:cNvSpPr>
+          <p:nvPr>
+            <p:ph type="body" idx="3" sz="quarter"/>
+          </p:nvPr>
+        </p:nvSpPr>
+        <p:spPr/>
+        <p:txBody>
+          <a:bodyPr/>
+          <a:lstStyle/>
+          <a:p>
+            <a:pPr algn="l"/>
+            <a:r>
+              <a:rPr sz="1300">
+                <a:latin typeface="Microsoft YaHei"/>
+                <a:ea typeface="Microsoft YaHei"/>
+                <a:cs typeface="Microsoft YaHei"/>
+              </a:rPr>
+              <a:t>【约 3.5 分钟 · 空间增值 · 第三部分主阵地之二】</a:t>
+            </a:r>
+          </a:p>
+          <a:p>
+            <a:pPr algn="l"/>
+            <a:r>
+              <a:rPr sz="1300">
+                <a:latin typeface="Microsoft YaHei"/>
+                <a:ea typeface="Microsoft YaHei"/>
+                <a:cs typeface="Microsoft YaHei"/>
+              </a:rPr>
+              <a:t>第二条主线是空间增值——靠科创生态让物业的价值二次跃升。</a:t>
+            </a:r>
+          </a:p>
+          <a:p>
+            <a:pPr algn="l"/>
+            <a:r>
+              <a:rPr sz="1300">
+                <a:latin typeface="Microsoft YaHei"/>
+                <a:ea typeface="Microsoft YaHei"/>
+                <a:cs typeface="Microsoft YaHei"/>
+              </a:rPr>
+              <a:t>左边是我们做项目的"生态四层结构"：</a:t>
+            </a:r>
+          </a:p>
+          <a:p>
+            <a:pPr algn="l"/>
+            <a:r>
+              <a:rPr sz="1300">
+                <a:latin typeface="Microsoft YaHei"/>
+                <a:ea typeface="Microsoft YaHei"/>
+                <a:cs typeface="Microsoft YaHei"/>
+              </a:rPr>
+              <a:t>最底层是空间层——高品质物业、共享场景、数字基础设施；</a:t>
+            </a:r>
+          </a:p>
+          <a:p>
+            <a:pPr algn="l"/>
+            <a:r>
+              <a:rPr sz="1300">
+                <a:latin typeface="Microsoft YaHei"/>
+                <a:ea typeface="Microsoft YaHei"/>
+                <a:cs typeface="Microsoft YaHei"/>
+              </a:rPr>
+              <a:t>往上是创新层——前沿科技沙龙、国际创新路演、高校智库；</a:t>
+            </a:r>
+          </a:p>
+          <a:p>
+            <a:pPr algn="l"/>
+            <a:r>
+              <a:rPr sz="1300">
+                <a:latin typeface="Microsoft YaHei"/>
+                <a:ea typeface="Microsoft YaHei"/>
+                <a:cs typeface="Microsoft YaHei"/>
+              </a:rPr>
+              <a:t>再往上是产业层——专精特新企业、总部基地、OPC 单一人公司；</a:t>
+            </a:r>
+          </a:p>
+          <a:p>
+            <a:pPr algn="l"/>
+            <a:r>
+              <a:rPr sz="1300">
+                <a:latin typeface="Microsoft YaHei"/>
+                <a:ea typeface="Microsoft YaHei"/>
+                <a:cs typeface="Microsoft YaHei"/>
+              </a:rPr>
+              <a:t>最上面是资本层——国资基金、产业基金、不动产 REITs。</a:t>
+            </a:r>
+          </a:p>
+          <a:p>
+            <a:pPr algn="l"/>
+            <a:r>
+              <a:rPr sz="1300">
+                <a:latin typeface="Microsoft YaHei"/>
+                <a:ea typeface="Microsoft YaHei"/>
+                <a:cs typeface="Microsoft YaHei"/>
+              </a:rPr>
+              <a:t>四层叠在一起，物业就从砖头变成了"生态位"。</a:t>
+            </a:r>
+          </a:p>
+          <a:p>
+            <a:pPr algn="l"/>
+            <a:r>
+              <a:rPr sz="1300">
+                <a:latin typeface="Microsoft YaHei"/>
+                <a:ea typeface="Microsoft YaHei"/>
+                <a:cs typeface="Microsoft YaHei"/>
+              </a:rPr>
+              <a:t>右边是几个我自己在做的典型场景：前沿科技沙龙、国际创新路演、专精特新加速器、OPC 共享总部——</a:t>
+            </a:r>
+          </a:p>
+          <a:p>
+            <a:pPr algn="l"/>
+            <a:r>
+              <a:rPr sz="1300">
+                <a:latin typeface="Microsoft YaHei"/>
+                <a:ea typeface="Microsoft YaHei"/>
+                <a:cs typeface="Microsoft YaHei"/>
+              </a:rPr>
+              <a:t>这些场景的本质，是把"出租平方米"升级为"出租生态位"。</a:t>
+            </a:r>
+          </a:p>
+          <a:p>
+            <a:pPr algn="l"/>
+            <a:r>
+              <a:rPr sz="1300">
+                <a:latin typeface="Microsoft YaHei"/>
+                <a:ea typeface="Microsoft YaHei"/>
+                <a:cs typeface="Microsoft YaHei"/>
+              </a:rPr>
+              <a:t>这是高质量发展在物业层面最直接的体现。</a:t>
+            </a:r>
+          </a:p>
+        </p:txBody>
+      </p:sp>
+      <p:sp>
+        <p:nvSpPr>
+          <p:cNvPr id="4" name="Slide Number Placeholder 3"/>
+          <p:cNvSpPr>
+            <a:spLocks noGrp="1"/>
+          </p:cNvSpPr>
+          <p:nvPr>
+            <p:ph type="sldNum" idx="5" sz="quarter"/>
+          </p:nvPr>
+        </p:nvSpPr>
+        <p:spPr/>
+      </p:sp>
+    </p:spTree>
+  </p:cSld>
+  <p:clrMapOvr>
+    <a:masterClrMapping/>
+  </p:clrMapOvr>
+</p:notes>
+</file>
+
+<file path=ppt/notesSlides/notesSlide15.xml><?xml version="1.0" encoding="utf-8"?>
+<p:notes xmlns:a="http://schemas.openxmlformats.org/drawingml/2006/main" xmlns:p="http://schemas.openxmlformats.org/presentationml/2006/main" xmlns:r="http://schemas.openxmlformats.org/officeDocument/2006/relationships">
+  <p:cSld>
+    <p:spTree>
+      <p:nvGrpSpPr>
+        <p:cNvPr id="1" name=""/>
+        <p:cNvGrpSpPr/>
+        <p:nvPr/>
+      </p:nvGrpSpPr>
+      <p:grpSpPr>
+        <a:xfrm>
+          <a:off x="0" y="0"/>
+          <a:ext cx="0" cy="0"/>
+          <a:chOff x="0" y="0"/>
+          <a:chExt cx="0" cy="0"/>
+        </a:xfrm>
+      </p:grpSpPr>
+      <p:sp>
+        <p:nvSpPr>
+          <p:cNvPr id="2" name="Slide Image Placeholder 1"/>
+          <p:cNvSpPr>
+            <a:spLocks noGrp="1"/>
+          </p:cNvSpPr>
+          <p:nvPr>
+            <p:ph type="sldImg" idx="2"/>
+          </p:nvPr>
+        </p:nvSpPr>
+        <p:spPr/>
+      </p:sp>
+      <p:sp>
+        <p:nvSpPr>
+          <p:cNvPr id="3" name="Notes Placeholder 2"/>
+          <p:cNvSpPr>
+            <a:spLocks noGrp="1"/>
+          </p:cNvSpPr>
+          <p:nvPr>
+            <p:ph type="body" idx="3" sz="quarter"/>
+          </p:nvPr>
+        </p:nvSpPr>
+        <p:spPr/>
+        <p:txBody>
+          <a:bodyPr/>
+          <a:lstStyle/>
+          <a:p>
+            <a:pPr algn="l"/>
+            <a:r>
+              <a:rPr sz="1300">
+                <a:latin typeface="Microsoft YaHei"/>
+                <a:ea typeface="Microsoft YaHei"/>
+                <a:cs typeface="Microsoft YaHei"/>
+              </a:rPr>
+              <a:t>【约 3 分钟 · 跨界协同 · 第三部分主阵地之三】</a:t>
+            </a:r>
+          </a:p>
+          <a:p>
+            <a:pPr algn="l"/>
+            <a:r>
+              <a:rPr sz="1300">
+                <a:latin typeface="Microsoft YaHei"/>
+                <a:ea typeface="Microsoft YaHei"/>
+                <a:cs typeface="Microsoft YaHei"/>
+              </a:rPr>
+              <a:t>第三条主线，跨界协同，也是我自己最看重的一条。</a:t>
+            </a:r>
+          </a:p>
+          <a:p>
+            <a:pPr algn="l"/>
+            <a:r>
+              <a:rPr sz="1300">
+                <a:latin typeface="Microsoft YaHei"/>
+                <a:ea typeface="Microsoft YaHei"/>
+                <a:cs typeface="Microsoft YaHei"/>
+              </a:rPr>
+              <a:t>不动产平台，要成为创新要素的"路由器"，把三个圈子串起来：</a:t>
+            </a:r>
+          </a:p>
+          <a:p>
+            <a:pPr algn="l"/>
+            <a:r>
+              <a:rPr sz="1300">
+                <a:latin typeface="Microsoft YaHei"/>
+                <a:ea typeface="Microsoft YaHei"/>
+                <a:cs typeface="Microsoft YaHei"/>
+              </a:rPr>
+              <a:t>学术圈——高校、智库、研究院，提供方向和方法；</a:t>
+            </a:r>
+          </a:p>
+          <a:p>
+            <a:pPr algn="l"/>
+            <a:r>
+              <a:rPr sz="1300">
+                <a:latin typeface="Microsoft YaHei"/>
+                <a:ea typeface="Microsoft YaHei"/>
+                <a:cs typeface="Microsoft YaHei"/>
+              </a:rPr>
+              <a:t>产业圈——实体企业、园区、协会，提供需求和场景；</a:t>
+            </a:r>
+          </a:p>
+          <a:p>
+            <a:pPr algn="l"/>
+            <a:r>
+              <a:rPr sz="1300">
+                <a:latin typeface="Microsoft YaHei"/>
+                <a:ea typeface="Microsoft YaHei"/>
+                <a:cs typeface="Microsoft YaHei"/>
+              </a:rPr>
+              <a:t>投资圈——基金、银行、REITs，提供资本和退出。</a:t>
+            </a:r>
+          </a:p>
+          <a:p>
+            <a:pPr algn="l"/>
+            <a:r>
+              <a:rPr sz="1300">
+                <a:latin typeface="Microsoft YaHei"/>
+                <a:ea typeface="Microsoft YaHei"/>
+                <a:cs typeface="Microsoft YaHei"/>
+              </a:rPr>
+              <a:t>三圈协同的红利，体现在三个闭环：</a:t>
+            </a:r>
+          </a:p>
+          <a:p>
+            <a:pPr algn="l"/>
+            <a:r>
+              <a:rPr sz="1300">
+                <a:latin typeface="Microsoft YaHei"/>
+                <a:ea typeface="Microsoft YaHei"/>
+                <a:cs typeface="Microsoft YaHei"/>
+              </a:rPr>
+              <a:t>理论到落地——高校研究在园区做中试和产业化；</a:t>
+            </a:r>
+          </a:p>
+          <a:p>
+            <a:pPr algn="l"/>
+            <a:r>
+              <a:rPr sz="1300">
+                <a:latin typeface="Microsoft YaHei"/>
+                <a:ea typeface="Microsoft YaHei"/>
+                <a:cs typeface="Microsoft YaHei"/>
+              </a:rPr>
+              <a:t>产业到资本——好项目通过 REITs 和私募实现价值变现；</a:t>
+            </a:r>
+          </a:p>
+          <a:p>
+            <a:pPr algn="l"/>
+            <a:r>
+              <a:rPr sz="1300">
+                <a:latin typeface="Microsoft YaHei"/>
+                <a:ea typeface="Microsoft YaHei"/>
+                <a:cs typeface="Microsoft YaHei"/>
+              </a:rPr>
+              <a:t>资本到学术——投资反哺研究和人才培养，再形成新一轮闭环。</a:t>
+            </a:r>
+          </a:p>
+          <a:p>
+            <a:pPr algn="l"/>
+            <a:r>
+              <a:rPr sz="1300">
+                <a:latin typeface="Microsoft YaHei"/>
+                <a:ea typeface="Microsoft YaHei"/>
+                <a:cs typeface="Microsoft YaHei"/>
+              </a:rPr>
+              <a:t>这种协同，会带来不动产价值的"二次跃升"——从空间溢价升级为生态溢价。</a:t>
+            </a:r>
+          </a:p>
+        </p:txBody>
+      </p:sp>
+      <p:sp>
+        <p:nvSpPr>
+          <p:cNvPr id="4" name="Slide Number Placeholder 3"/>
+          <p:cNvSpPr>
+            <a:spLocks noGrp="1"/>
+          </p:cNvSpPr>
+          <p:nvPr>
+            <p:ph type="sldNum" idx="5" sz="quarter"/>
+          </p:nvPr>
+        </p:nvSpPr>
+        <p:spPr/>
+      </p:sp>
+    </p:spTree>
+  </p:cSld>
+  <p:clrMapOvr>
+    <a:masterClrMapping/>
+  </p:clrMapOvr>
+</p:notes>
+</file>
+
+<file path=ppt/notesSlides/notesSlide16.xml><?xml version="1.0" encoding="utf-8"?>
+<p:notes xmlns:a="http://schemas.openxmlformats.org/drawingml/2006/main" xmlns:p="http://schemas.openxmlformats.org/presentationml/2006/main" xmlns:r="http://schemas.openxmlformats.org/officeDocument/2006/relationships">
+  <p:cSld>
+    <p:spTree>
+      <p:nvGrpSpPr>
+        <p:cNvPr id="1" name=""/>
+        <p:cNvGrpSpPr/>
+        <p:nvPr/>
+      </p:nvGrpSpPr>
+      <p:grpSpPr>
+        <a:xfrm>
+          <a:off x="0" y="0"/>
+          <a:ext cx="0" cy="0"/>
+          <a:chOff x="0" y="0"/>
+          <a:chExt cx="0" cy="0"/>
+        </a:xfrm>
+      </p:grpSpPr>
+      <p:sp>
+        <p:nvSpPr>
+          <p:cNvPr id="2" name="Slide Image Placeholder 1"/>
+          <p:cNvSpPr>
+            <a:spLocks noGrp="1"/>
+          </p:cNvSpPr>
+          <p:nvPr>
+            <p:ph type="sldImg" idx="2"/>
+          </p:nvPr>
+        </p:nvSpPr>
+        <p:spPr/>
+      </p:sp>
+      <p:sp>
+        <p:nvSpPr>
+          <p:cNvPr id="3" name="Notes Placeholder 2"/>
+          <p:cNvSpPr>
+            <a:spLocks noGrp="1"/>
+          </p:cNvSpPr>
+          <p:nvPr>
+            <p:ph type="body" idx="3" sz="quarter"/>
+          </p:nvPr>
+        </p:nvSpPr>
+        <p:spPr/>
+        <p:txBody>
+          <a:bodyPr/>
+          <a:lstStyle/>
+          <a:p>
+            <a:pPr algn="l"/>
+            <a:r>
+              <a:rPr sz="1300">
+                <a:latin typeface="Microsoft YaHei"/>
+                <a:ea typeface="Microsoft YaHei"/>
+                <a:cs typeface="Microsoft YaHei"/>
+              </a:rPr>
+              <a:t>【PART 04 章节切换 · 10 秒】</a:t>
+            </a:r>
+          </a:p>
+          <a:p>
+            <a:pPr algn="l"/>
+            <a:r>
+              <a:rPr sz="1300">
+                <a:latin typeface="Microsoft YaHei"/>
+                <a:ea typeface="Microsoft YaHei"/>
+                <a:cs typeface="Microsoft YaHei"/>
+              </a:rPr>
+              <a:t>接下来是最后一部分——总结展望。</a:t>
+            </a:r>
+          </a:p>
+        </p:txBody>
+      </p:sp>
+      <p:sp>
+        <p:nvSpPr>
+          <p:cNvPr id="4" name="Slide Number Placeholder 3"/>
+          <p:cNvSpPr>
+            <a:spLocks noGrp="1"/>
+          </p:cNvSpPr>
+          <p:nvPr>
+            <p:ph type="sldNum" idx="5" sz="quarter"/>
+          </p:nvPr>
+        </p:nvSpPr>
+        <p:spPr/>
+      </p:sp>
+    </p:spTree>
+  </p:cSld>
+  <p:clrMapOvr>
+    <a:masterClrMapping/>
+  </p:clrMapOvr>
+</p:notes>
+</file>
+
+<file path=ppt/notesSlides/notesSlide17.xml><?xml version="1.0" encoding="utf-8"?>
+<p:notes xmlns:a="http://schemas.openxmlformats.org/drawingml/2006/main" xmlns:p="http://schemas.openxmlformats.org/presentationml/2006/main" xmlns:r="http://schemas.openxmlformats.org/officeDocument/2006/relationships">
+  <p:cSld>
+    <p:spTree>
+      <p:nvGrpSpPr>
+        <p:cNvPr id="1" name=""/>
+        <p:cNvGrpSpPr/>
+        <p:nvPr/>
+      </p:nvGrpSpPr>
+      <p:grpSpPr>
+        <a:xfrm>
+          <a:off x="0" y="0"/>
+          <a:ext cx="0" cy="0"/>
+          <a:chOff x="0" y="0"/>
+          <a:chExt cx="0" cy="0"/>
+        </a:xfrm>
+      </p:grpSpPr>
+      <p:sp>
+        <p:nvSpPr>
+          <p:cNvPr id="2" name="Slide Image Placeholder 1"/>
+          <p:cNvSpPr>
+            <a:spLocks noGrp="1"/>
+          </p:cNvSpPr>
+          <p:nvPr>
+            <p:ph type="sldImg" idx="2"/>
+          </p:nvPr>
+        </p:nvSpPr>
+        <p:spPr/>
+      </p:sp>
+      <p:sp>
+        <p:nvSpPr>
+          <p:cNvPr id="3" name="Notes Placeholder 2"/>
+          <p:cNvSpPr>
+            <a:spLocks noGrp="1"/>
+          </p:cNvSpPr>
+          <p:nvPr>
+            <p:ph type="body" idx="3" sz="quarter"/>
+          </p:nvPr>
+        </p:nvSpPr>
+        <p:spPr/>
+        <p:txBody>
+          <a:bodyPr/>
+          <a:lstStyle/>
+          <a:p>
+            <a:pPr algn="l"/>
+            <a:r>
+              <a:rPr sz="1300">
+                <a:latin typeface="Microsoft YaHei"/>
+                <a:ea typeface="Microsoft YaHei"/>
+                <a:cs typeface="Microsoft YaHei"/>
+              </a:rPr>
+              <a:t>【约 2 分钟 · 发展共识】</a:t>
+            </a:r>
+          </a:p>
+          <a:p>
+            <a:pPr algn="l"/>
+            <a:r>
+              <a:rPr sz="1300">
+                <a:latin typeface="Microsoft YaHei"/>
+                <a:ea typeface="Microsoft YaHei"/>
+                <a:cs typeface="Microsoft YaHei"/>
+              </a:rPr>
+              <a:t>"十五五"的高质量发展，绝不是哪一方单打独斗能做到的，</a:t>
+            </a:r>
+          </a:p>
+          <a:p>
+            <a:pPr algn="l"/>
+            <a:r>
+              <a:rPr sz="1300">
+                <a:latin typeface="Microsoft YaHei"/>
+                <a:ea typeface="Microsoft YaHei"/>
+                <a:cs typeface="Microsoft YaHei"/>
+              </a:rPr>
+              <a:t>它是学术界和实业界的双轮驱动：</a:t>
+            </a:r>
+          </a:p>
+          <a:p>
+            <a:pPr algn="l"/>
+            <a:r>
+              <a:rPr sz="1300">
+                <a:latin typeface="Microsoft YaHei"/>
+                <a:ea typeface="Microsoft YaHei"/>
+                <a:cs typeface="Microsoft YaHei"/>
+              </a:rPr>
+              <a:t>学术界负责提供方向——理论指引、方法供给、人才培育；</a:t>
+            </a:r>
+          </a:p>
+          <a:p>
+            <a:pPr algn="l"/>
+            <a:r>
+              <a:rPr sz="1300">
+                <a:latin typeface="Microsoft YaHei"/>
+                <a:ea typeface="Microsoft YaHei"/>
+                <a:cs typeface="Microsoft YaHei"/>
+              </a:rPr>
+              <a:t>实业界负责蹚出新路——工具创新、场景试验、生态构建。</a:t>
+            </a:r>
+          </a:p>
+          <a:p>
+            <a:pPr algn="l"/>
+            <a:r>
+              <a:rPr sz="1300">
+                <a:latin typeface="Microsoft YaHei"/>
+                <a:ea typeface="Microsoft YaHei"/>
+                <a:cs typeface="Microsoft YaHei"/>
+              </a:rPr>
+              <a:t>没有学术界的"望远镜"，行业容易短视；</a:t>
+            </a:r>
+          </a:p>
+          <a:p>
+            <a:pPr algn="l"/>
+            <a:r>
+              <a:rPr sz="1300">
+                <a:latin typeface="Microsoft YaHei"/>
+                <a:ea typeface="Microsoft YaHei"/>
+                <a:cs typeface="Microsoft YaHei"/>
+              </a:rPr>
+              <a:t>没有实业界的"显微镜"，理论也容易悬空。</a:t>
+            </a:r>
+          </a:p>
+          <a:p>
+            <a:pPr algn="l"/>
+            <a:r>
+              <a:rPr sz="1300">
+                <a:latin typeface="Microsoft YaHei"/>
+                <a:ea typeface="Microsoft YaHei"/>
+                <a:cs typeface="Microsoft YaHei"/>
+              </a:rPr>
+              <a:t>今天能在房产经济学会与各位老师同坐一席，本身就是双轮驱动最好的注脚。</a:t>
+            </a:r>
+          </a:p>
+        </p:txBody>
+      </p:sp>
+      <p:sp>
+        <p:nvSpPr>
+          <p:cNvPr id="4" name="Slide Number Placeholder 3"/>
+          <p:cNvSpPr>
+            <a:spLocks noGrp="1"/>
+          </p:cNvSpPr>
+          <p:nvPr>
+            <p:ph type="sldNum" idx="5" sz="quarter"/>
+          </p:nvPr>
+        </p:nvSpPr>
+        <p:spPr/>
+      </p:sp>
+    </p:spTree>
+  </p:cSld>
+  <p:clrMapOvr>
+    <a:masterClrMapping/>
+  </p:clrMapOvr>
+</p:notes>
+</file>
+
+<file path=ppt/notesSlides/notesSlide18.xml><?xml version="1.0" encoding="utf-8"?>
+<p:notes xmlns:a="http://schemas.openxmlformats.org/drawingml/2006/main" xmlns:p="http://schemas.openxmlformats.org/presentationml/2006/main" xmlns:r="http://schemas.openxmlformats.org/officeDocument/2006/relationships">
+  <p:cSld>
+    <p:spTree>
+      <p:nvGrpSpPr>
+        <p:cNvPr id="1" name=""/>
+        <p:cNvGrpSpPr/>
+        <p:nvPr/>
+      </p:nvGrpSpPr>
+      <p:grpSpPr>
+        <a:xfrm>
+          <a:off x="0" y="0"/>
+          <a:ext cx="0" cy="0"/>
+          <a:chOff x="0" y="0"/>
+          <a:chExt cx="0" cy="0"/>
+        </a:xfrm>
+      </p:grpSpPr>
+      <p:sp>
+        <p:nvSpPr>
+          <p:cNvPr id="2" name="Slide Image Placeholder 1"/>
+          <p:cNvSpPr>
+            <a:spLocks noGrp="1"/>
+          </p:cNvSpPr>
+          <p:nvPr>
+            <p:ph type="sldImg" idx="2"/>
+          </p:nvPr>
+        </p:nvSpPr>
+        <p:spPr/>
+      </p:sp>
+      <p:sp>
+        <p:nvSpPr>
+          <p:cNvPr id="3" name="Notes Placeholder 2"/>
+          <p:cNvSpPr>
+            <a:spLocks noGrp="1"/>
+          </p:cNvSpPr>
+          <p:nvPr>
+            <p:ph type="body" idx="3" sz="quarter"/>
+          </p:nvPr>
+        </p:nvSpPr>
+        <p:spPr/>
+        <p:txBody>
+          <a:bodyPr/>
+          <a:lstStyle/>
+          <a:p>
+            <a:pPr algn="l"/>
+            <a:r>
+              <a:rPr sz="1300">
+                <a:latin typeface="Microsoft YaHei"/>
+                <a:ea typeface="Microsoft YaHei"/>
+                <a:cs typeface="Microsoft YaHei"/>
+              </a:rPr>
+              <a:t>【约 1 分钟 · 结语】</a:t>
+            </a:r>
+          </a:p>
+          <a:p>
+            <a:pPr algn="l"/>
+            <a:r>
+              <a:rPr sz="1300">
+                <a:latin typeface="Microsoft YaHei"/>
+                <a:ea typeface="Microsoft YaHei"/>
+                <a:cs typeface="Microsoft YaHei"/>
+              </a:rPr>
+              <a:t>最后我想说：</a:t>
+            </a:r>
+          </a:p>
+          <a:p>
+            <a:pPr algn="l"/>
+            <a:r>
+              <a:rPr sz="1300">
+                <a:latin typeface="Microsoft YaHei"/>
+                <a:ea typeface="Microsoft YaHei"/>
+                <a:cs typeface="Microsoft YaHei"/>
+              </a:rPr>
+              <a:t>房地产行业确实在阵痛期，</a:t>
+            </a:r>
+          </a:p>
+          <a:p>
+            <a:pPr algn="l"/>
+            <a:r>
+              <a:rPr sz="1300">
+                <a:latin typeface="Microsoft YaHei"/>
+                <a:ea typeface="Microsoft YaHei"/>
+                <a:cs typeface="Microsoft YaHei"/>
+              </a:rPr>
+              <a:t>但所谓"和光同尘"——只要我们顺应科技大势，顺应国家"十五五"的宏观规划，</a:t>
+            </a:r>
+          </a:p>
+          <a:p>
+            <a:pPr algn="l"/>
+            <a:r>
+              <a:rPr sz="1300">
+                <a:latin typeface="Microsoft YaHei"/>
+                <a:ea typeface="Microsoft YaHei"/>
+                <a:cs typeface="Microsoft YaHei"/>
+              </a:rPr>
+              <a:t>不动产，依然是孕育新质生产力的最佳土壤。</a:t>
+            </a:r>
+          </a:p>
+          <a:p>
+            <a:pPr algn="l"/>
+            <a:r>
+              <a:rPr sz="1300">
+                <a:latin typeface="Microsoft YaHei"/>
+                <a:ea typeface="Microsoft YaHei"/>
+                <a:cs typeface="Microsoft YaHei"/>
+              </a:rPr>
+              <a:t>中青年是这个行业未来五年最重要的力量，希望我们一起把新模式蹚出来。</a:t>
+            </a:r>
+          </a:p>
+          <a:p>
+            <a:pPr algn="l"/>
+            <a:r>
+              <a:rPr sz="1300">
+                <a:latin typeface="Microsoft YaHei"/>
+                <a:ea typeface="Microsoft YaHei"/>
+                <a:cs typeface="Microsoft YaHei"/>
+              </a:rPr>
+              <a:t>我的汇报到这里，敬请各位老师批评指正，谢谢大家。</a:t>
+            </a:r>
+          </a:p>
+        </p:txBody>
+      </p:sp>
+      <p:sp>
+        <p:nvSpPr>
+          <p:cNvPr id="4" name="Slide Number Placeholder 3"/>
+          <p:cNvSpPr>
+            <a:spLocks noGrp="1"/>
+          </p:cNvSpPr>
+          <p:nvPr>
+            <p:ph type="sldNum" idx="5" sz="quarter"/>
+          </p:nvPr>
+        </p:nvSpPr>
+        <p:spPr/>
+      </p:sp>
+    </p:spTree>
+  </p:cSld>
+  <p:clrMapOvr>
+    <a:masterClrMapping/>
+  </p:clrMapOvr>
+</p:notes>
+</file>
+
+<file path=ppt/notesSlides/notesSlide2.xml><?xml version="1.0" encoding="utf-8"?>
+<p:notes xmlns:a="http://schemas.openxmlformats.org/drawingml/2006/main" xmlns:p="http://schemas.openxmlformats.org/presentationml/2006/main" xmlns:r="http://schemas.openxmlformats.org/officeDocument/2006/relationships">
+  <p:cSld>
+    <p:spTree>
+      <p:nvGrpSpPr>
+        <p:cNvPr id="1" name=""/>
+        <p:cNvGrpSpPr/>
+        <p:nvPr/>
+      </p:nvGrpSpPr>
+      <p:grpSpPr>
+        <a:xfrm>
+          <a:off x="0" y="0"/>
+          <a:ext cx="0" cy="0"/>
+          <a:chOff x="0" y="0"/>
+          <a:chExt cx="0" cy="0"/>
+        </a:xfrm>
+      </p:grpSpPr>
+      <p:sp>
+        <p:nvSpPr>
+          <p:cNvPr id="2" name="Slide Image Placeholder 1"/>
+          <p:cNvSpPr>
+            <a:spLocks noGrp="1"/>
+          </p:cNvSpPr>
+          <p:nvPr>
+            <p:ph type="sldImg" idx="2"/>
+          </p:nvPr>
+        </p:nvSpPr>
+        <p:spPr/>
+      </p:sp>
+      <p:sp>
+        <p:nvSpPr>
+          <p:cNvPr id="3" name="Notes Placeholder 2"/>
+          <p:cNvSpPr>
+            <a:spLocks noGrp="1"/>
+          </p:cNvSpPr>
+          <p:nvPr>
+            <p:ph type="body" idx="3" sz="quarter"/>
+          </p:nvPr>
+        </p:nvSpPr>
+        <p:spPr/>
+        <p:txBody>
+          <a:bodyPr/>
+          <a:lstStyle/>
+          <a:p>
+            <a:pPr algn="l"/>
+            <a:r>
+              <a:rPr sz="1300">
+                <a:latin typeface="Microsoft YaHei"/>
+                <a:ea typeface="Microsoft YaHei"/>
+                <a:cs typeface="Microsoft YaHei"/>
+              </a:rPr>
+              <a:t>【过场页 · 不展开】</a:t>
+            </a:r>
+          </a:p>
+          <a:p>
+            <a:pPr algn="l"/>
+            <a:r>
+              <a:rPr sz="1300">
+                <a:latin typeface="Microsoft YaHei"/>
+                <a:ea typeface="Microsoft YaHei"/>
+                <a:cs typeface="Microsoft YaHei"/>
+              </a:rPr>
+              <a:t>这一页是摘要，前面已经书面提交过，今天就不再宣读。</a:t>
+            </a:r>
+          </a:p>
+          <a:p>
+            <a:pPr algn="l"/>
+            <a:r>
+              <a:rPr sz="1300">
+                <a:latin typeface="Microsoft YaHei"/>
+                <a:ea typeface="Microsoft YaHei"/>
+                <a:cs typeface="Microsoft YaHei"/>
+              </a:rPr>
+              <a:t>直接进入大纲。</a:t>
+            </a:r>
+          </a:p>
+        </p:txBody>
+      </p:sp>
+      <p:sp>
+        <p:nvSpPr>
+          <p:cNvPr id="4" name="Slide Number Placeholder 3"/>
+          <p:cNvSpPr>
+            <a:spLocks noGrp="1"/>
+          </p:cNvSpPr>
+          <p:nvPr>
+            <p:ph type="sldNum" idx="5" sz="quarter"/>
+          </p:nvPr>
+        </p:nvSpPr>
+        <p:spPr/>
+      </p:sp>
+    </p:spTree>
+  </p:cSld>
+  <p:clrMapOvr>
+    <a:masterClrMapping/>
+  </p:clrMapOvr>
+</p:notes>
+</file>
+
+<file path=ppt/notesSlides/notesSlide3.xml><?xml version="1.0" encoding="utf-8"?>
+<p:notes xmlns:a="http://schemas.openxmlformats.org/drawingml/2006/main" xmlns:p="http://schemas.openxmlformats.org/presentationml/2006/main" xmlns:r="http://schemas.openxmlformats.org/officeDocument/2006/relationships">
+  <p:cSld>
+    <p:spTree>
+      <p:nvGrpSpPr>
+        <p:cNvPr id="1" name=""/>
+        <p:cNvGrpSpPr/>
+        <p:nvPr/>
+      </p:nvGrpSpPr>
+      <p:grpSpPr>
+        <a:xfrm>
+          <a:off x="0" y="0"/>
+          <a:ext cx="0" cy="0"/>
+          <a:chOff x="0" y="0"/>
+          <a:chExt cx="0" cy="0"/>
+        </a:xfrm>
+      </p:grpSpPr>
+      <p:sp>
+        <p:nvSpPr>
+          <p:cNvPr id="2" name="Slide Image Placeholder 1"/>
+          <p:cNvSpPr>
+            <a:spLocks noGrp="1"/>
+          </p:cNvSpPr>
+          <p:nvPr>
+            <p:ph type="sldImg" idx="2"/>
+          </p:nvPr>
+        </p:nvSpPr>
+        <p:spPr/>
+      </p:sp>
+      <p:sp>
+        <p:nvSpPr>
+          <p:cNvPr id="3" name="Notes Placeholder 2"/>
+          <p:cNvSpPr>
+            <a:spLocks noGrp="1"/>
+          </p:cNvSpPr>
+          <p:nvPr>
+            <p:ph type="body" idx="3" sz="quarter"/>
+          </p:nvPr>
+        </p:nvSpPr>
+        <p:spPr/>
+        <p:txBody>
+          <a:bodyPr/>
+          <a:lstStyle/>
+          <a:p>
+            <a:pPr algn="l"/>
+            <a:r>
+              <a:rPr sz="1300">
+                <a:latin typeface="Microsoft YaHei"/>
+                <a:ea typeface="Microsoft YaHei"/>
+                <a:cs typeface="Microsoft YaHei"/>
+              </a:rPr>
+              <a:t>【宣读大纲 · 约 1 分钟】</a:t>
+            </a:r>
+          </a:p>
+          <a:p>
+            <a:pPr algn="l"/>
+            <a:r>
+              <a:rPr sz="1300">
+                <a:latin typeface="Microsoft YaHei"/>
+                <a:ea typeface="Microsoft YaHei"/>
+                <a:cs typeface="Microsoft YaHei"/>
+              </a:rPr>
+              <a:t>今天的汇报，一共分四个板块：</a:t>
+            </a:r>
+          </a:p>
+          <a:p>
+            <a:pPr algn="l"/>
+            <a:r>
+              <a:rPr sz="1300">
+                <a:latin typeface="Microsoft YaHei"/>
+                <a:ea typeface="Microsoft YaHei"/>
+                <a:cs typeface="Microsoft YaHei"/>
+              </a:rPr>
+              <a:t>第一，时代定调，我用 5 分钟，谈"十五五"开局与房地产周期的新旧转换；</a:t>
+            </a:r>
+          </a:p>
+          <a:p>
+            <a:pPr algn="l"/>
+            <a:r>
+              <a:rPr sz="1300">
+                <a:latin typeface="Microsoft YaHei"/>
+                <a:ea typeface="Microsoft YaHei"/>
+                <a:cs typeface="Microsoft YaHei"/>
+              </a:rPr>
+              <a:t>第二，破局寻路，用 8 分钟，谈房地产新模式的核心内涵；</a:t>
+            </a:r>
+          </a:p>
+          <a:p>
+            <a:pPr algn="l"/>
+            <a:r>
+              <a:rPr sz="1300">
+                <a:latin typeface="Microsoft YaHei"/>
+                <a:ea typeface="Microsoft YaHei"/>
+                <a:cs typeface="Microsoft YaHei"/>
+              </a:rPr>
+              <a:t>第三，核心动能，用 12 分钟，也是今天的重点，谈科技创新如何驱动不动产高质量发展；</a:t>
+            </a:r>
+          </a:p>
+          <a:p>
+            <a:pPr algn="l"/>
+            <a:r>
+              <a:rPr sz="1300">
+                <a:latin typeface="Microsoft YaHei"/>
+                <a:ea typeface="Microsoft YaHei"/>
+                <a:cs typeface="Microsoft YaHei"/>
+              </a:rPr>
+              <a:t>最后第四部分，用 5 分钟，做一个总结展望。</a:t>
+            </a:r>
+          </a:p>
+          <a:p>
+            <a:pPr algn="l"/>
+            <a:r>
+              <a:rPr sz="1300">
+                <a:latin typeface="Microsoft YaHei"/>
+                <a:ea typeface="Microsoft YaHei"/>
+                <a:cs typeface="Microsoft YaHei"/>
+              </a:rPr>
+              <a:t>我尽量在 30 分钟内汇报完，把更多时间留给各位老师的指导和点评。</a:t>
+            </a:r>
+          </a:p>
+        </p:txBody>
+      </p:sp>
+      <p:sp>
+        <p:nvSpPr>
+          <p:cNvPr id="4" name="Slide Number Placeholder 3"/>
+          <p:cNvSpPr>
+            <a:spLocks noGrp="1"/>
+          </p:cNvSpPr>
+          <p:nvPr>
+            <p:ph type="sldNum" idx="5" sz="quarter"/>
+          </p:nvPr>
+        </p:nvSpPr>
+        <p:spPr/>
+      </p:sp>
+    </p:spTree>
+  </p:cSld>
+  <p:clrMapOvr>
+    <a:masterClrMapping/>
+  </p:clrMapOvr>
+</p:notes>
+</file>
+
+<file path=ppt/notesSlides/notesSlide4.xml><?xml version="1.0" encoding="utf-8"?>
+<p:notes xmlns:a="http://schemas.openxmlformats.org/drawingml/2006/main" xmlns:p="http://schemas.openxmlformats.org/presentationml/2006/main" xmlns:r="http://schemas.openxmlformats.org/officeDocument/2006/relationships">
+  <p:cSld>
+    <p:spTree>
+      <p:nvGrpSpPr>
+        <p:cNvPr id="1" name=""/>
+        <p:cNvGrpSpPr/>
+        <p:nvPr/>
+      </p:nvGrpSpPr>
+      <p:grpSpPr>
+        <a:xfrm>
+          <a:off x="0" y="0"/>
+          <a:ext cx="0" cy="0"/>
+          <a:chOff x="0" y="0"/>
+          <a:chExt cx="0" cy="0"/>
+        </a:xfrm>
+      </p:grpSpPr>
+      <p:sp>
+        <p:nvSpPr>
+          <p:cNvPr id="2" name="Slide Image Placeholder 1"/>
+          <p:cNvSpPr>
+            <a:spLocks noGrp="1"/>
+          </p:cNvSpPr>
+          <p:nvPr>
+            <p:ph type="sldImg" idx="2"/>
+          </p:nvPr>
+        </p:nvSpPr>
+        <p:spPr/>
+      </p:sp>
+      <p:sp>
+        <p:nvSpPr>
+          <p:cNvPr id="3" name="Notes Placeholder 2"/>
+          <p:cNvSpPr>
+            <a:spLocks noGrp="1"/>
+          </p:cNvSpPr>
+          <p:nvPr>
+            <p:ph type="body" idx="3" sz="quarter"/>
+          </p:nvPr>
+        </p:nvSpPr>
+        <p:spPr/>
+        <p:txBody>
+          <a:bodyPr/>
+          <a:lstStyle/>
+          <a:p>
+            <a:pPr algn="l"/>
+            <a:r>
+              <a:rPr sz="1300">
+                <a:latin typeface="Microsoft YaHei"/>
+                <a:ea typeface="Microsoft YaHei"/>
+                <a:cs typeface="Microsoft YaHei"/>
+              </a:rPr>
+              <a:t>【PART 01 章节切换 · 10 秒】</a:t>
+            </a:r>
+          </a:p>
+          <a:p>
+            <a:pPr algn="l"/>
+            <a:r>
+              <a:rPr sz="1300">
+                <a:latin typeface="Microsoft YaHei"/>
+                <a:ea typeface="Microsoft YaHei"/>
+                <a:cs typeface="Microsoft YaHei"/>
+              </a:rPr>
+              <a:t>首先，进入第一板块——时代定调。</a:t>
+            </a:r>
+          </a:p>
+        </p:txBody>
+      </p:sp>
+      <p:sp>
+        <p:nvSpPr>
+          <p:cNvPr id="4" name="Slide Number Placeholder 3"/>
+          <p:cNvSpPr>
+            <a:spLocks noGrp="1"/>
+          </p:cNvSpPr>
+          <p:nvPr>
+            <p:ph type="sldNum" idx="5" sz="quarter"/>
+          </p:nvPr>
+        </p:nvSpPr>
+        <p:spPr/>
+      </p:sp>
+    </p:spTree>
+  </p:cSld>
+  <p:clrMapOvr>
+    <a:masterClrMapping/>
+  </p:clrMapOvr>
+</p:notes>
+</file>
+
+<file path=ppt/notesSlides/notesSlide5.xml><?xml version="1.0" encoding="utf-8"?>
+<p:notes xmlns:a="http://schemas.openxmlformats.org/drawingml/2006/main" xmlns:p="http://schemas.openxmlformats.org/presentationml/2006/main" xmlns:r="http://schemas.openxmlformats.org/officeDocument/2006/relationships">
+  <p:cSld>
+    <p:spTree>
+      <p:nvGrpSpPr>
+        <p:cNvPr id="1" name=""/>
+        <p:cNvGrpSpPr/>
+        <p:nvPr/>
+      </p:nvGrpSpPr>
+      <p:grpSpPr>
+        <a:xfrm>
+          <a:off x="0" y="0"/>
+          <a:ext cx="0" cy="0"/>
+          <a:chOff x="0" y="0"/>
+          <a:chExt cx="0" cy="0"/>
+        </a:xfrm>
+      </p:grpSpPr>
+      <p:sp>
+        <p:nvSpPr>
+          <p:cNvPr id="2" name="Slide Image Placeholder 1"/>
+          <p:cNvSpPr>
+            <a:spLocks noGrp="1"/>
+          </p:cNvSpPr>
+          <p:nvPr>
+            <p:ph type="sldImg" idx="2"/>
+          </p:nvPr>
+        </p:nvSpPr>
+        <p:spPr/>
+      </p:sp>
+      <p:sp>
+        <p:nvSpPr>
+          <p:cNvPr id="3" name="Notes Placeholder 2"/>
+          <p:cNvSpPr>
+            <a:spLocks noGrp="1"/>
+          </p:cNvSpPr>
+          <p:nvPr>
+            <p:ph type="body" idx="3" sz="quarter"/>
+          </p:nvPr>
+        </p:nvSpPr>
+        <p:spPr/>
+        <p:txBody>
+          <a:bodyPr/>
+          <a:lstStyle/>
+          <a:p>
+            <a:pPr algn="l"/>
+            <a:r>
+              <a:rPr sz="1300">
+                <a:latin typeface="Microsoft YaHei"/>
+                <a:ea typeface="Microsoft YaHei"/>
+                <a:cs typeface="Microsoft YaHei"/>
+              </a:rPr>
+              <a:t>【约 90 秒 · 宏观背景】</a:t>
+            </a:r>
+          </a:p>
+          <a:p>
+            <a:pPr algn="l"/>
+            <a:r>
+              <a:rPr sz="1300">
+                <a:latin typeface="Microsoft YaHei"/>
+                <a:ea typeface="Microsoft YaHei"/>
+                <a:cs typeface="Microsoft YaHei"/>
+              </a:rPr>
+              <a:t>要谈房地产，首先要把它放回国家大盘里看。</a:t>
+            </a:r>
+          </a:p>
+          <a:p>
+            <a:pPr algn="l"/>
+            <a:r>
+              <a:rPr sz="1300">
+                <a:latin typeface="Microsoft YaHei"/>
+                <a:ea typeface="Microsoft YaHei"/>
+                <a:cs typeface="Microsoft YaHei"/>
+              </a:rPr>
+              <a:t>"十五五"是一个非常特殊的五年：它不是简单的"十四五"的延续，而是国家由中高速增长正式转向高质量发展的关键期，也是构建新发展格局、培育新质生产力的攻坚期。</a:t>
+            </a:r>
+          </a:p>
+          <a:p>
+            <a:pPr algn="l"/>
+            <a:r>
+              <a:rPr sz="1300">
+                <a:latin typeface="Microsoft YaHei"/>
+                <a:ea typeface="Microsoft YaHei"/>
+                <a:cs typeface="Microsoft YaHei"/>
+              </a:rPr>
+              <a:t>政策主线非常清晰——扩大内需、科技自立自强、构建现代化产业体系，这"三条腿"决定了所有支柱产业的未来定位。</a:t>
+            </a:r>
+          </a:p>
+          <a:p>
+            <a:pPr algn="l"/>
+            <a:r>
+              <a:rPr sz="1300">
+                <a:latin typeface="Microsoft YaHei"/>
+                <a:ea typeface="Microsoft YaHei"/>
+                <a:cs typeface="Microsoft YaHei"/>
+              </a:rPr>
+              <a:t>落到房地产，行业坐标已经变了："房住不炒"长期不变，重心从增量开发转向存量经营和服务实体经济。</a:t>
+            </a:r>
+          </a:p>
+          <a:p>
+            <a:pPr algn="l"/>
+            <a:r>
+              <a:rPr sz="1300">
+                <a:latin typeface="Microsoft YaHei"/>
+                <a:ea typeface="Microsoft YaHei"/>
+                <a:cs typeface="Microsoft YaHei"/>
+              </a:rPr>
+              <a:t>所以，房地产的角色，已经从过去的"增长引擎"，转向"质量底盘"。</a:t>
+            </a:r>
+          </a:p>
+        </p:txBody>
+      </p:sp>
+      <p:sp>
+        <p:nvSpPr>
+          <p:cNvPr id="4" name="Slide Number Placeholder 3"/>
+          <p:cNvSpPr>
+            <a:spLocks noGrp="1"/>
+          </p:cNvSpPr>
+          <p:nvPr>
+            <p:ph type="sldNum" idx="5" sz="quarter"/>
+          </p:nvPr>
+        </p:nvSpPr>
+        <p:spPr/>
+      </p:sp>
+    </p:spTree>
+  </p:cSld>
+  <p:clrMapOvr>
+    <a:masterClrMapping/>
+  </p:clrMapOvr>
+</p:notes>
+</file>
+
+<file path=ppt/notesSlides/notesSlide6.xml><?xml version="1.0" encoding="utf-8"?>
+<p:notes xmlns:a="http://schemas.openxmlformats.org/drawingml/2006/main" xmlns:p="http://schemas.openxmlformats.org/presentationml/2006/main" xmlns:r="http://schemas.openxmlformats.org/officeDocument/2006/relationships">
+  <p:cSld>
+    <p:spTree>
+      <p:nvGrpSpPr>
+        <p:cNvPr id="1" name=""/>
+        <p:cNvGrpSpPr/>
+        <p:nvPr/>
+      </p:nvGrpSpPr>
+      <p:grpSpPr>
+        <a:xfrm>
+          <a:off x="0" y="0"/>
+          <a:ext cx="0" cy="0"/>
+          <a:chOff x="0" y="0"/>
+          <a:chExt cx="0" cy="0"/>
+        </a:xfrm>
+      </p:grpSpPr>
+      <p:sp>
+        <p:nvSpPr>
+          <p:cNvPr id="2" name="Slide Image Placeholder 1"/>
+          <p:cNvSpPr>
+            <a:spLocks noGrp="1"/>
+          </p:cNvSpPr>
+          <p:nvPr>
+            <p:ph type="sldImg" idx="2"/>
+          </p:nvPr>
+        </p:nvSpPr>
+        <p:spPr/>
+      </p:sp>
+      <p:sp>
+        <p:nvSpPr>
+          <p:cNvPr id="3" name="Notes Placeholder 2"/>
+          <p:cNvSpPr>
+            <a:spLocks noGrp="1"/>
+          </p:cNvSpPr>
+          <p:nvPr>
+            <p:ph type="body" idx="3" sz="quarter"/>
+          </p:nvPr>
+        </p:nvSpPr>
+        <p:spPr/>
+        <p:txBody>
+          <a:bodyPr/>
+          <a:lstStyle/>
+          <a:p>
+            <a:pPr algn="l"/>
+            <a:r>
+              <a:rPr sz="1300">
+                <a:latin typeface="Microsoft YaHei"/>
+                <a:ea typeface="Microsoft YaHei"/>
+                <a:cs typeface="Microsoft YaHei"/>
+              </a:rPr>
+              <a:t>【约 2 分钟 · 旧 vs 新模式对照】</a:t>
+            </a:r>
+          </a:p>
+          <a:p>
+            <a:pPr algn="l"/>
+            <a:r>
+              <a:rPr sz="1300">
+                <a:latin typeface="Microsoft YaHei"/>
+                <a:ea typeface="Microsoft YaHei"/>
+                <a:cs typeface="Microsoft YaHei"/>
+              </a:rPr>
+              <a:t>这张表，是我自己复盘出来的"旧模式"和"新模式"对照。</a:t>
+            </a:r>
+          </a:p>
+          <a:p>
+            <a:pPr algn="l"/>
+            <a:r>
+              <a:rPr sz="1300">
+                <a:latin typeface="Microsoft YaHei"/>
+                <a:ea typeface="Microsoft YaHei"/>
+                <a:cs typeface="Microsoft YaHei"/>
+              </a:rPr>
+              <a:t>左边是大家熟悉的旧模式：高杠杆、高周转、拼土地、拼销售、拼规模排名，背后是土地财政加金融加杠杆。</a:t>
+            </a:r>
+          </a:p>
+          <a:p>
+            <a:pPr algn="l"/>
+            <a:r>
+              <a:rPr sz="1300">
+                <a:latin typeface="Microsoft YaHei"/>
+                <a:ea typeface="Microsoft YaHei"/>
+                <a:cs typeface="Microsoft YaHei"/>
+              </a:rPr>
+              <a:t>右边是"十五五"的新模式：稳健经营、提质增效，竞争核心从土地储备转到存量运营和服务能力；</a:t>
+            </a:r>
+          </a:p>
+          <a:p>
+            <a:pPr algn="l"/>
+            <a:r>
+              <a:rPr sz="1300">
+                <a:latin typeface="Microsoft YaHei"/>
+                <a:ea typeface="Microsoft YaHei"/>
+                <a:cs typeface="Microsoft YaHei"/>
+              </a:rPr>
+              <a:t>收益来源从一次性开发利润，变成长期的运营收益、资管费和增值服务；</a:t>
+            </a:r>
+          </a:p>
+          <a:p>
+            <a:pPr algn="l"/>
+            <a:r>
+              <a:rPr sz="1300">
+                <a:latin typeface="Microsoft YaHei"/>
+                <a:ea typeface="Microsoft YaHei"/>
+                <a:cs typeface="Microsoft YaHei"/>
+              </a:rPr>
+              <a:t>评价指标从规模和市占率，转向 ROE、ROA、NOI、客户复购这些资管化的指标；</a:t>
+            </a:r>
+          </a:p>
+          <a:p>
+            <a:pPr algn="l"/>
+            <a:r>
+              <a:rPr sz="1300">
+                <a:latin typeface="Microsoft YaHei"/>
+                <a:ea typeface="Microsoft YaHei"/>
+                <a:cs typeface="Microsoft YaHei"/>
+              </a:rPr>
+              <a:t>和宏观的关系，也从加杠杆变成服务实体、赋能产业。</a:t>
+            </a:r>
+          </a:p>
+          <a:p>
+            <a:pPr algn="l"/>
+            <a:r>
+              <a:rPr sz="1300">
+                <a:latin typeface="Microsoft YaHei"/>
+                <a:ea typeface="Microsoft YaHei"/>
+                <a:cs typeface="Microsoft YaHei"/>
+              </a:rPr>
+              <a:t>我想强调一句：这个转变不是周期性回调，而是结构性、范式性的"换轨"。</a:t>
+            </a:r>
+          </a:p>
+        </p:txBody>
+      </p:sp>
+      <p:sp>
+        <p:nvSpPr>
+          <p:cNvPr id="4" name="Slide Number Placeholder 3"/>
+          <p:cNvSpPr>
+            <a:spLocks noGrp="1"/>
+          </p:cNvSpPr>
+          <p:nvPr>
+            <p:ph type="sldNum" idx="5" sz="quarter"/>
+          </p:nvPr>
+        </p:nvSpPr>
+        <p:spPr/>
+      </p:sp>
+    </p:spTree>
+  </p:cSld>
+  <p:clrMapOvr>
+    <a:masterClrMapping/>
+  </p:clrMapOvr>
+</p:notes>
+</file>
+
+<file path=ppt/notesSlides/notesSlide7.xml><?xml version="1.0" encoding="utf-8"?>
+<p:notes xmlns:a="http://schemas.openxmlformats.org/drawingml/2006/main" xmlns:p="http://schemas.openxmlformats.org/presentationml/2006/main" xmlns:r="http://schemas.openxmlformats.org/officeDocument/2006/relationships">
+  <p:cSld>
+    <p:spTree>
+      <p:nvGrpSpPr>
+        <p:cNvPr id="1" name=""/>
+        <p:cNvGrpSpPr/>
+        <p:nvPr/>
+      </p:nvGrpSpPr>
+      <p:grpSpPr>
+        <a:xfrm>
+          <a:off x="0" y="0"/>
+          <a:ext cx="0" cy="0"/>
+          <a:chOff x="0" y="0"/>
+          <a:chExt cx="0" cy="0"/>
+        </a:xfrm>
+      </p:grpSpPr>
+      <p:sp>
+        <p:nvSpPr>
+          <p:cNvPr id="2" name="Slide Image Placeholder 1"/>
+          <p:cNvSpPr>
+            <a:spLocks noGrp="1"/>
+          </p:cNvSpPr>
+          <p:nvPr>
+            <p:ph type="sldImg" idx="2"/>
+          </p:nvPr>
+        </p:nvSpPr>
+        <p:spPr/>
+      </p:sp>
+      <p:sp>
+        <p:nvSpPr>
+          <p:cNvPr id="3" name="Notes Placeholder 2"/>
+          <p:cNvSpPr>
+            <a:spLocks noGrp="1"/>
+          </p:cNvSpPr>
+          <p:nvPr>
+            <p:ph type="body" idx="3" sz="quarter"/>
+          </p:nvPr>
+        </p:nvSpPr>
+        <p:spPr/>
+        <p:txBody>
+          <a:bodyPr/>
+          <a:lstStyle/>
+          <a:p>
+            <a:pPr algn="l"/>
+            <a:r>
+              <a:rPr sz="1300">
+                <a:latin typeface="Microsoft YaHei"/>
+                <a:ea typeface="Microsoft YaHei"/>
+                <a:cs typeface="Microsoft YaHei"/>
+              </a:rPr>
+              <a:t>【约 1 分钟 · 核心论点 · 一定要让老师们记住这句话】</a:t>
+            </a:r>
+          </a:p>
+          <a:p>
+            <a:pPr algn="l"/>
+            <a:r>
+              <a:rPr sz="1300">
+                <a:latin typeface="Microsoft YaHei"/>
+                <a:ea typeface="Microsoft YaHei"/>
+                <a:cs typeface="Microsoft YaHei"/>
+              </a:rPr>
+              <a:t>基于以上判断，我提出今天汇报的核心论点：</a:t>
+            </a:r>
+          </a:p>
+          <a:p>
+            <a:pPr algn="l"/>
+            <a:r>
+              <a:rPr sz="1300">
+                <a:latin typeface="Microsoft YaHei"/>
+                <a:ea typeface="Microsoft YaHei"/>
+                <a:cs typeface="Microsoft YaHei"/>
+              </a:rPr>
+              <a:t>"十五五"期间的房地产高质量发展，不再是单纯的去化和土储竞争，而是"存量资产精细化运营"与"科技产业化融合"的竞争。</a:t>
+            </a:r>
+          </a:p>
+          <a:p>
+            <a:pPr algn="l"/>
+            <a:r>
+              <a:rPr sz="1300">
+                <a:latin typeface="Microsoft YaHei"/>
+                <a:ea typeface="Microsoft YaHei"/>
+                <a:cs typeface="Microsoft YaHei"/>
+              </a:rPr>
+              <a:t>具体可以拆成三个根本转移：</a:t>
+            </a:r>
+          </a:p>
+          <a:p>
+            <a:pPr algn="l"/>
+            <a:r>
+              <a:rPr sz="1300">
+                <a:latin typeface="Microsoft YaHei"/>
+                <a:ea typeface="Microsoft YaHei"/>
+                <a:cs typeface="Microsoft YaHei"/>
+              </a:rPr>
+              <a:t>第一，从开发转向运营——以前拼建造速度，现在拼服务体验和长期收益；</a:t>
+            </a:r>
+          </a:p>
+          <a:p>
+            <a:pPr algn="l"/>
+            <a:r>
+              <a:rPr sz="1300">
+                <a:latin typeface="Microsoft YaHei"/>
+                <a:ea typeface="Microsoft YaHei"/>
+                <a:cs typeface="Microsoft YaHei"/>
+              </a:rPr>
+              <a:t>第二，从资产转向平台——重资产持有让位于轻资产管理输出；</a:t>
+            </a:r>
+          </a:p>
+          <a:p>
+            <a:pPr algn="l"/>
+            <a:r>
+              <a:rPr sz="1300">
+                <a:latin typeface="Microsoft YaHei"/>
+                <a:ea typeface="Microsoft YaHei"/>
+                <a:cs typeface="Microsoft YaHei"/>
+              </a:rPr>
+              <a:t>第三，从空间转向生态——单纯提供物理空间已经不够了，要构建产业+科创+资本的生态。</a:t>
+            </a:r>
+          </a:p>
+          <a:p>
+            <a:pPr algn="l"/>
+            <a:r>
+              <a:rPr sz="1300">
+                <a:latin typeface="Microsoft YaHei"/>
+                <a:ea typeface="Microsoft YaHei"/>
+                <a:cs typeface="Microsoft YaHei"/>
+              </a:rPr>
+              <a:t>这三个转移，是我后面所有内容的逻辑起点。</a:t>
+            </a:r>
+          </a:p>
+        </p:txBody>
+      </p:sp>
+      <p:sp>
+        <p:nvSpPr>
+          <p:cNvPr id="4" name="Slide Number Placeholder 3"/>
+          <p:cNvSpPr>
+            <a:spLocks noGrp="1"/>
+          </p:cNvSpPr>
+          <p:nvPr>
+            <p:ph type="sldNum" idx="5" sz="quarter"/>
+          </p:nvPr>
+        </p:nvSpPr>
+        <p:spPr/>
+      </p:sp>
+    </p:spTree>
+  </p:cSld>
+  <p:clrMapOvr>
+    <a:masterClrMapping/>
+  </p:clrMapOvr>
+</p:notes>
+</file>
+
+<file path=ppt/notesSlides/notesSlide8.xml><?xml version="1.0" encoding="utf-8"?>
+<p:notes xmlns:a="http://schemas.openxmlformats.org/drawingml/2006/main" xmlns:p="http://schemas.openxmlformats.org/presentationml/2006/main" xmlns:r="http://schemas.openxmlformats.org/officeDocument/2006/relationships">
+  <p:cSld>
+    <p:spTree>
+      <p:nvGrpSpPr>
+        <p:cNvPr id="1" name=""/>
+        <p:cNvGrpSpPr/>
+        <p:nvPr/>
+      </p:nvGrpSpPr>
+      <p:grpSpPr>
+        <a:xfrm>
+          <a:off x="0" y="0"/>
+          <a:ext cx="0" cy="0"/>
+          <a:chOff x="0" y="0"/>
+          <a:chExt cx="0" cy="0"/>
+        </a:xfrm>
+      </p:grpSpPr>
+      <p:sp>
+        <p:nvSpPr>
+          <p:cNvPr id="2" name="Slide Image Placeholder 1"/>
+          <p:cNvSpPr>
+            <a:spLocks noGrp="1"/>
+          </p:cNvSpPr>
+          <p:nvPr>
+            <p:ph type="sldImg" idx="2"/>
+          </p:nvPr>
+        </p:nvSpPr>
+        <p:spPr/>
+      </p:sp>
+      <p:sp>
+        <p:nvSpPr>
+          <p:cNvPr id="3" name="Notes Placeholder 2"/>
+          <p:cNvSpPr>
+            <a:spLocks noGrp="1"/>
+          </p:cNvSpPr>
+          <p:nvPr>
+            <p:ph type="body" idx="3" sz="quarter"/>
+          </p:nvPr>
+        </p:nvSpPr>
+        <p:spPr/>
+        <p:txBody>
+          <a:bodyPr/>
+          <a:lstStyle/>
+          <a:p>
+            <a:pPr algn="l"/>
+            <a:r>
+              <a:rPr sz="1300">
+                <a:latin typeface="Microsoft YaHei"/>
+                <a:ea typeface="Microsoft YaHei"/>
+                <a:cs typeface="Microsoft YaHei"/>
+              </a:rPr>
+              <a:t>【PART 02 章节切换 · 10 秒】</a:t>
+            </a:r>
+          </a:p>
+          <a:p>
+            <a:pPr algn="l"/>
+            <a:r>
+              <a:rPr sz="1300">
+                <a:latin typeface="Microsoft YaHei"/>
+                <a:ea typeface="Microsoft YaHei"/>
+                <a:cs typeface="Microsoft YaHei"/>
+              </a:rPr>
+              <a:t>接下来第二部分，破局寻路——具体看新模式的内涵是什么。</a:t>
+            </a:r>
+          </a:p>
+        </p:txBody>
+      </p:sp>
+      <p:sp>
+        <p:nvSpPr>
+          <p:cNvPr id="4" name="Slide Number Placeholder 3"/>
+          <p:cNvSpPr>
+            <a:spLocks noGrp="1"/>
+          </p:cNvSpPr>
+          <p:nvPr>
+            <p:ph type="sldNum" idx="5" sz="quarter"/>
+          </p:nvPr>
+        </p:nvSpPr>
+        <p:spPr/>
+      </p:sp>
+    </p:spTree>
+  </p:cSld>
+  <p:clrMapOvr>
+    <a:masterClrMapping/>
+  </p:clrMapOvr>
+</p:notes>
+</file>
+
+<file path=ppt/notesSlides/notesSlide9.xml><?xml version="1.0" encoding="utf-8"?>
+<p:notes xmlns:a="http://schemas.openxmlformats.org/drawingml/2006/main" xmlns:p="http://schemas.openxmlformats.org/presentationml/2006/main" xmlns:r="http://schemas.openxmlformats.org/officeDocument/2006/relationships">
+  <p:cSld>
+    <p:spTree>
+      <p:nvGrpSpPr>
+        <p:cNvPr id="1" name=""/>
+        <p:cNvGrpSpPr/>
+        <p:nvPr/>
+      </p:nvGrpSpPr>
+      <p:grpSpPr>
+        <a:xfrm>
+          <a:off x="0" y="0"/>
+          <a:ext cx="0" cy="0"/>
+          <a:chOff x="0" y="0"/>
+          <a:chExt cx="0" cy="0"/>
+        </a:xfrm>
+      </p:grpSpPr>
+      <p:sp>
+        <p:nvSpPr>
+          <p:cNvPr id="2" name="Slide Image Placeholder 1"/>
+          <p:cNvSpPr>
+            <a:spLocks noGrp="1"/>
+          </p:cNvSpPr>
+          <p:nvPr>
+            <p:ph type="sldImg" idx="2"/>
+          </p:nvPr>
+        </p:nvSpPr>
+        <p:spPr/>
+      </p:sp>
+      <p:sp>
+        <p:nvSpPr>
+          <p:cNvPr id="3" name="Notes Placeholder 2"/>
+          <p:cNvSpPr>
+            <a:spLocks noGrp="1"/>
+          </p:cNvSpPr>
+          <p:nvPr>
+            <p:ph type="body" idx="3" sz="quarter"/>
+          </p:nvPr>
+        </p:nvSpPr>
+        <p:spPr/>
+        <p:txBody>
+          <a:bodyPr/>
+          <a:lstStyle/>
+          <a:p>
+            <a:pPr algn="l"/>
+            <a:r>
+              <a:rPr sz="1300">
+                <a:latin typeface="Microsoft YaHei"/>
+                <a:ea typeface="Microsoft YaHei"/>
+                <a:cs typeface="Microsoft YaHei"/>
+              </a:rPr>
+              <a:t>【约 3 分钟 · 空间载体跃迁】</a:t>
+            </a:r>
+          </a:p>
+          <a:p>
+            <a:pPr algn="l"/>
+            <a:r>
+              <a:rPr sz="1300">
+                <a:latin typeface="Microsoft YaHei"/>
+                <a:ea typeface="Microsoft YaHei"/>
+                <a:cs typeface="Microsoft YaHei"/>
+              </a:rPr>
+              <a:t>我用"代际跃迁"这个视角来理解空间载体的演变：</a:t>
+            </a:r>
+          </a:p>
+          <a:p>
+            <a:pPr algn="l"/>
+            <a:r>
+              <a:rPr sz="1300">
+                <a:latin typeface="Microsoft YaHei"/>
+                <a:ea typeface="Microsoft YaHei"/>
+                <a:cs typeface="Microsoft YaHei"/>
+              </a:rPr>
+              <a:t>1.0 阶段，是解决"有没有"的居住空间——刚需和改善；</a:t>
+            </a:r>
+          </a:p>
+          <a:p>
+            <a:pPr algn="l"/>
+            <a:r>
+              <a:rPr sz="1300">
+                <a:latin typeface="Microsoft YaHei"/>
+                <a:ea typeface="Microsoft YaHei"/>
+                <a:cs typeface="Microsoft YaHei"/>
+              </a:rPr>
+              <a:t>2.0 阶段，是解决"好不好"的办公空间——商办、商业、物流；</a:t>
+            </a:r>
+          </a:p>
+          <a:p>
+            <a:pPr algn="l"/>
+            <a:r>
+              <a:rPr sz="1300">
+                <a:latin typeface="Microsoft YaHei"/>
+                <a:ea typeface="Microsoft YaHei"/>
+                <a:cs typeface="Microsoft YaHei"/>
+              </a:rPr>
+              <a:t>3.0 阶段，是产城融合，解决"活不活"——科创园、总部基地开始出现；</a:t>
+            </a:r>
+          </a:p>
+          <a:p>
+            <a:pPr algn="l"/>
+            <a:r>
+              <a:rPr sz="1300">
+                <a:latin typeface="Microsoft YaHei"/>
+                <a:ea typeface="Microsoft YaHei"/>
+                <a:cs typeface="Microsoft YaHei"/>
+              </a:rPr>
+              <a:t>而"十五五"我们要建设的，是 4.0 阶段——科创生态，解决的是"能不能孕育新质生产力"这个根本问题。</a:t>
+            </a:r>
+          </a:p>
+          <a:p>
+            <a:pPr algn="l"/>
+            <a:r>
+              <a:rPr sz="1300">
+                <a:latin typeface="Microsoft YaHei"/>
+                <a:ea typeface="Microsoft YaHei"/>
+                <a:cs typeface="Microsoft YaHei"/>
+              </a:rPr>
+              <a:t>这一阶段的不动产，已经不只是容器，而是让"科技、资本、人才"三方共振的产业舞台，我们行内有句话叫"超级会客厅"。</a:t>
+            </a:r>
+          </a:p>
+          <a:p>
+            <a:pPr algn="l"/>
+            <a:r>
+              <a:rPr sz="1300">
+                <a:latin typeface="Microsoft YaHei"/>
+                <a:ea typeface="Microsoft YaHei"/>
+                <a:cs typeface="Microsoft YaHei"/>
+              </a:rPr>
+              <a:t>我想这是判断一个项目高不高质的最重要标尺。</a:t>
+            </a:r>
+          </a:p>
+        </p:txBody>
+      </p:sp>
+      <p:sp>
+        <p:nvSpPr>
+          <p:cNvPr id="4" name="Slide Number Placeholder 3"/>
+          <p:cNvSpPr>
+            <a:spLocks noGrp="1"/>
+          </p:cNvSpPr>
+          <p:nvPr>
+            <p:ph type="sldNum" idx="5" sz="quarter"/>
+          </p:nvPr>
+        </p:nvSpPr>
+        <p:spPr/>
+      </p:sp>
+    </p:spTree>
+  </p:cSld>
+  <p:clrMapOvr>
+    <a:masterClrMapping/>
+  </p:clrMapOvr>
+</p:notes>
 </file>
 
 <file path=ppt/slideLayouts/slideLayout1.xml><?xml version="1.0" encoding="utf-8"?>
@@ -24089,4 +26896,324 @@
   </a:objectDefaults>
   <a:extraClrSchemeLst/>
 </a:theme>
+</file>
+
+<file path=ppt/theme/theme2.xml><?xml version="1.0" encoding="utf-8"?>
+<a:theme xmlns:a="http://schemas.openxmlformats.org/drawingml/2006/main" name="Office Theme">
+  <a:themeElements>
+    <a:clrScheme name="Office">
+      <a:dk1>
+        <a:sysClr val="windowText" lastClr="000000"/>
+      </a:dk1>
+      <a:lt1>
+        <a:sysClr val="window" lastClr="FFFFFF"/>
+      </a:lt1>
+      <a:dk2>
+        <a:srgbClr val="1F497D"/>
+      </a:dk2>
+      <a:lt2>
+        <a:srgbClr val="EEECE1"/>
+      </a:lt2>
+      <a:accent1>
+        <a:srgbClr val="4F81BD"/>
+      </a:accent1>
+      <a:accent2>
+        <a:srgbClr val="C0504D"/>
+      </a:accent2>
+      <a:accent3>
+        <a:srgbClr val="9BBB59"/>
+      </a:accent3>
+      <a:accent4>
+        <a:srgbClr val="8064A2"/>
+      </a:accent4>
+      <a:accent5>
+        <a:srgbClr val="4BACC6"/>
+      </a:accent5>
+      <a:accent6>
+        <a:srgbClr val="F79646"/>
+      </a:accent6>
+      <a:hlink>
+        <a:srgbClr val="0000FF"/>
+      </a:hlink>
+      <a:folHlink>
+        <a:srgbClr val="800080"/>
+      </a:folHlink>
+    </a:clrScheme>
+    <a:fontScheme name="Office">
+      <a:majorFont>
+        <a:latin typeface="Calibri"/>
+        <a:ea typeface=""/>
+        <a:cs typeface=""/>
+        <a:font script="Jpan" typeface="ＭＳ Ｐゴシック"/>
+        <a:font script="Hang" typeface="맑은 고딕"/>
+        <a:font script="Hans" typeface="宋体"/>
+        <a:font script="Hant" typeface="新細明體"/>
+        <a:font script="Arab" typeface="Times New Roman"/>
+        <a:font script="Hebr" typeface="Times New Roman"/>
+        <a:font script="Thai" typeface="Angsana New"/>
+        <a:font script="Ethi" typeface="Nyala"/>
+        <a:font script="Beng" typeface="Vrinda"/>
+        <a:font script="Gujr" typeface="Shruti"/>
+        <a:font script="Khmr" typeface="MoolBoran"/>
+        <a:font script="Knda" typeface="Tunga"/>
+        <a:font script="Guru" typeface="Raavi"/>
+        <a:font script="Cans" typeface="Euphemia"/>
+        <a:font script="Cher" typeface="Plantagenet Cherokee"/>
+        <a:font script="Yiii" typeface="Microsoft Yi Baiti"/>
+        <a:font script="Tibt" typeface="Microsoft Himalaya"/>
+        <a:font script="Thaa" typeface="MV Boli"/>
+        <a:font script="Deva" typeface="Mangal"/>
+        <a:font script="Telu" typeface="Gautami"/>
+        <a:font script="Taml" typeface="Latha"/>
+        <a:font script="Syrc" typeface="Estrangelo Edessa"/>
+        <a:font script="Orya" typeface="Kalinga"/>
+        <a:font script="Mlym" typeface="Kartika"/>
+        <a:font script="Laoo" typeface="DokChampa"/>
+        <a:font script="Sinh" typeface="Iskoola Pota"/>
+        <a:font script="Mong" typeface="Mongolian Baiti"/>
+        <a:font script="Viet" typeface="Times New Roman"/>
+        <a:font script="Uigh" typeface="Microsoft Uighur"/>
+        <a:font script="Geor" typeface="Sylfaen"/>
+      </a:majorFont>
+      <a:minorFont>
+        <a:latin typeface="Calibri"/>
+        <a:ea typeface=""/>
+        <a:cs typeface=""/>
+        <a:font script="Jpan" typeface="ＭＳ Ｐゴシック"/>
+        <a:font script="Hang" typeface="맑은 고딕"/>
+        <a:font script="Hans" typeface="宋体"/>
+        <a:font script="Hant" typeface="新細明體"/>
+        <a:font script="Arab" typeface="Arial"/>
+        <a:font script="Hebr" typeface="Arial"/>
+        <a:font script="Thai" typeface="Cordia New"/>
+        <a:font script="Ethi" typeface="Nyala"/>
+        <a:font script="Beng" typeface="Vrinda"/>
+        <a:font script="Gujr" typeface="Shruti"/>
+        <a:font script="Khmr" typeface="DaunPenh"/>
+        <a:font script="Knda" typeface="Tunga"/>
+        <a:font script="Guru" typeface="Raavi"/>
+        <a:font script="Cans" typeface="Euphemia"/>
+        <a:font script="Cher" typeface="Plantagenet Cherokee"/>
+        <a:font script="Yiii" typeface="Microsoft Yi Baiti"/>
+        <a:font script="Tibt" typeface="Microsoft Himalaya"/>
+        <a:font script="Thaa" typeface="MV Boli"/>
+        <a:font script="Deva" typeface="Mangal"/>
+        <a:font script="Telu" typeface="Gautami"/>
+        <a:font script="Taml" typeface="Latha"/>
+        <a:font script="Syrc" typeface="Estrangelo Edessa"/>
+        <a:font script="Orya" typeface="Kalinga"/>
+        <a:font script="Mlym" typeface="Kartika"/>
+        <a:font script="Laoo" typeface="DokChampa"/>
+        <a:font script="Sinh" typeface="Iskoola Pota"/>
+        <a:font script="Mong" typeface="Mongolian Baiti"/>
+        <a:font script="Viet" typeface="Arial"/>
+        <a:font script="Uigh" typeface="Microsoft Uighur"/>
+        <a:font script="Geor" typeface="Sylfaen"/>
+      </a:minorFont>
+    </a:fontScheme>
+    <a:fmtScheme name="Office">
+      <a:fillStyleLst>
+        <a:solidFill>
+          <a:schemeClr val="phClr"/>
+        </a:solidFill>
+        <a:gradFill rotWithShape="1">
+          <a:gsLst>
+            <a:gs pos="0">
+              <a:schemeClr val="phClr">
+                <a:tint val="50000"/>
+                <a:satMod val="300000"/>
+              </a:schemeClr>
+            </a:gs>
+            <a:gs pos="35000">
+              <a:schemeClr val="phClr">
+                <a:tint val="37000"/>
+                <a:satMod val="300000"/>
+              </a:schemeClr>
+            </a:gs>
+            <a:gs pos="100000">
+              <a:schemeClr val="phClr">
+                <a:tint val="15000"/>
+                <a:satMod val="350000"/>
+              </a:schemeClr>
+            </a:gs>
+          </a:gsLst>
+          <a:lin ang="16200000" scaled="1"/>
+        </a:gradFill>
+        <a:gradFill rotWithShape="1">
+          <a:gsLst>
+            <a:gs pos="0">
+              <a:schemeClr val="phClr">
+                <a:tint val="100000"/>
+                <a:shade val="100000"/>
+                <a:satMod val="130000"/>
+              </a:schemeClr>
+            </a:gs>
+            <a:gs pos="100000">
+              <a:schemeClr val="phClr">
+                <a:tint val="50000"/>
+                <a:shade val="100000"/>
+                <a:satMod val="350000"/>
+              </a:schemeClr>
+            </a:gs>
+          </a:gsLst>
+          <a:lin ang="16200000" scaled="0"/>
+        </a:gradFill>
+      </a:fillStyleLst>
+      <a:lnStyleLst>
+        <a:ln w="9525" cap="flat" cmpd="sng" algn="ctr">
+          <a:solidFill>
+            <a:schemeClr val="phClr">
+              <a:shade val="95000"/>
+              <a:satMod val="105000"/>
+            </a:schemeClr>
+          </a:solidFill>
+          <a:prstDash val="solid"/>
+        </a:ln>
+        <a:ln w="25400" cap="flat" cmpd="sng" algn="ctr">
+          <a:solidFill>
+            <a:schemeClr val="phClr"/>
+          </a:solidFill>
+          <a:prstDash val="solid"/>
+        </a:ln>
+        <a:ln w="38100" cap="flat" cmpd="sng" algn="ctr">
+          <a:solidFill>
+            <a:schemeClr val="phClr"/>
+          </a:solidFill>
+          <a:prstDash val="solid"/>
+        </a:ln>
+      </a:lnStyleLst>
+      <a:effectStyleLst>
+        <a:effectStyle>
+          <a:effectLst>
+            <a:outerShdw blurRad="40000" dist="20000" dir="5400000" rotWithShape="0">
+              <a:srgbClr val="000000">
+                <a:alpha val="38000"/>
+              </a:srgbClr>
+            </a:outerShdw>
+          </a:effectLst>
+        </a:effectStyle>
+        <a:effectStyle>
+          <a:effectLst>
+            <a:outerShdw blurRad="40000" dist="23000" dir="5400000" rotWithShape="0">
+              <a:srgbClr val="000000">
+                <a:alpha val="35000"/>
+              </a:srgbClr>
+            </a:outerShdw>
+          </a:effectLst>
+        </a:effectStyle>
+        <a:effectStyle>
+          <a:effectLst>
+            <a:outerShdw blurRad="40000" dist="23000" dir="5400000" rotWithShape="0">
+              <a:srgbClr val="000000">
+                <a:alpha val="35000"/>
+              </a:srgbClr>
+            </a:outerShdw>
+          </a:effectLst>
+          <a:scene3d>
+            <a:camera prst="orthographicFront">
+              <a:rot lat="0" lon="0" rev="0"/>
+            </a:camera>
+            <a:lightRig rig="threePt" dir="t">
+              <a:rot lat="0" lon="0" rev="1200000"/>
+            </a:lightRig>
+          </a:scene3d>
+          <a:sp3d>
+            <a:bevelT w="63500" h="25400"/>
+          </a:sp3d>
+        </a:effectStyle>
+      </a:effectStyleLst>
+      <a:bgFillStyleLst>
+        <a:solidFill>
+          <a:schemeClr val="phClr"/>
+        </a:solidFill>
+        <a:gradFill rotWithShape="1">
+          <a:gsLst>
+            <a:gs pos="0">
+              <a:schemeClr val="phClr">
+                <a:tint val="40000"/>
+                <a:satMod val="350000"/>
+              </a:schemeClr>
+            </a:gs>
+            <a:gs pos="40000">
+              <a:schemeClr val="phClr">
+                <a:tint val="45000"/>
+                <a:shade val="99000"/>
+                <a:satMod val="350000"/>
+              </a:schemeClr>
+            </a:gs>
+            <a:gs pos="100000">
+              <a:schemeClr val="phClr">
+                <a:shade val="20000"/>
+                <a:satMod val="255000"/>
+              </a:schemeClr>
+            </a:gs>
+          </a:gsLst>
+          <a:path path="circle">
+            <a:fillToRect l="50000" t="-80000" r="50000" b="180000"/>
+          </a:path>
+        </a:gradFill>
+        <a:gradFill rotWithShape="1">
+          <a:gsLst>
+            <a:gs pos="0">
+              <a:schemeClr val="phClr">
+                <a:tint val="80000"/>
+                <a:satMod val="300000"/>
+              </a:schemeClr>
+            </a:gs>
+            <a:gs pos="100000">
+              <a:schemeClr val="phClr">
+                <a:shade val="30000"/>
+                <a:satMod val="200000"/>
+              </a:schemeClr>
+            </a:gs>
+          </a:gsLst>
+          <a:path path="circle">
+            <a:fillToRect l="50000" t="50000" r="50000" b="50000"/>
+          </a:path>
+        </a:gradFill>
+      </a:bgFillStyleLst>
+    </a:fmtScheme>
+  </a:themeElements>
+  <a:objectDefaults>
+    <a:spDef>
+      <a:spPr/>
+      <a:bodyPr/>
+      <a:lstStyle/>
+      <a:style>
+        <a:lnRef idx="1">
+          <a:schemeClr val="accent1"/>
+        </a:lnRef>
+        <a:fillRef idx="3">
+          <a:schemeClr val="accent1"/>
+        </a:fillRef>
+        <a:effectRef idx="2">
+          <a:schemeClr val="accent1"/>
+        </a:effectRef>
+        <a:fontRef idx="minor">
+          <a:schemeClr val="lt1"/>
+        </a:fontRef>
+      </a:style>
+    </a:spDef>
+    <a:lnDef>
+      <a:spPr/>
+      <a:bodyPr/>
+      <a:lstStyle/>
+      <a:style>
+        <a:lnRef idx="2">
+          <a:schemeClr val="accent1"/>
+        </a:lnRef>
+        <a:fillRef idx="0">
+          <a:schemeClr val="accent1"/>
+        </a:fillRef>
+        <a:effectRef idx="1">
+          <a:schemeClr val="accent1"/>
+        </a:effectRef>
+        <a:fontRef idx="minor">
+          <a:schemeClr val="tx1"/>
+        </a:fontRef>
+      </a:style>
+    </a:lnDef>
+  </a:objectDefaults>
+  <a:extraClrSchemeLst/>
+</a:theme>
 </file>